--- a/Slide/MicroController/01.Scratch.pptx
+++ b/Slide/MicroController/01.Scratch.pptx
@@ -8,6 +8,9 @@
     <p:sldId id="256" r:id="rId2"/>
     <p:sldId id="258" r:id="rId3"/>
     <p:sldId id="257" r:id="rId4"/>
+    <p:sldId id="259" r:id="rId5"/>
+    <p:sldId id="260" r:id="rId6"/>
+    <p:sldId id="261" r:id="rId7"/>
   </p:sldIdLst>
   <p:sldSz cx="12192000" cy="6858000"/>
   <p:notesSz cx="6858000" cy="9144000"/>
@@ -106,6 +109,11 @@
       </a:defRPr>
     </a:lvl9pPr>
   </p:defaultTextStyle>
+  <p:extLst>
+    <p:ext uri="{EFAFB233-063F-42B5-8137-9DF3F51BA10A}">
+      <p15:sldGuideLst xmlns:p15="http://schemas.microsoft.com/office/powerpoint/2012/main"/>
+    </p:ext>
+  </p:extLst>
 </p:presentation>
 </file>
 
@@ -256,7 +264,7 @@
           <a:p>
             <a:fld id="{9636EE4A-4441-42C2-9290-E89E57CCAC53}" type="datetimeFigureOut">
               <a:rPr lang="en-US" smtClean="0"/>
-              <a:t>12/24/2024</a:t>
+              <a:t>2/2/2026</a:t>
             </a:fld>
             <a:endParaRPr lang="en-US"/>
           </a:p>
@@ -454,7 +462,7 @@
           <a:p>
             <a:fld id="{9636EE4A-4441-42C2-9290-E89E57CCAC53}" type="datetimeFigureOut">
               <a:rPr lang="en-US" smtClean="0"/>
-              <a:t>12/24/2024</a:t>
+              <a:t>2/2/2026</a:t>
             </a:fld>
             <a:endParaRPr lang="en-US"/>
           </a:p>
@@ -662,7 +670,7 @@
           <a:p>
             <a:fld id="{9636EE4A-4441-42C2-9290-E89E57CCAC53}" type="datetimeFigureOut">
               <a:rPr lang="en-US" smtClean="0"/>
-              <a:t>12/24/2024</a:t>
+              <a:t>2/2/2026</a:t>
             </a:fld>
             <a:endParaRPr lang="en-US"/>
           </a:p>
@@ -860,7 +868,7 @@
           <a:p>
             <a:fld id="{9636EE4A-4441-42C2-9290-E89E57CCAC53}" type="datetimeFigureOut">
               <a:rPr lang="en-US" smtClean="0"/>
-              <a:t>12/24/2024</a:t>
+              <a:t>2/2/2026</a:t>
             </a:fld>
             <a:endParaRPr lang="en-US"/>
           </a:p>
@@ -1135,7 +1143,7 @@
           <a:p>
             <a:fld id="{9636EE4A-4441-42C2-9290-E89E57CCAC53}" type="datetimeFigureOut">
               <a:rPr lang="en-US" smtClean="0"/>
-              <a:t>12/24/2024</a:t>
+              <a:t>2/2/2026</a:t>
             </a:fld>
             <a:endParaRPr lang="en-US"/>
           </a:p>
@@ -1400,7 +1408,7 @@
           <a:p>
             <a:fld id="{9636EE4A-4441-42C2-9290-E89E57CCAC53}" type="datetimeFigureOut">
               <a:rPr lang="en-US" smtClean="0"/>
-              <a:t>12/24/2024</a:t>
+              <a:t>2/2/2026</a:t>
             </a:fld>
             <a:endParaRPr lang="en-US"/>
           </a:p>
@@ -1812,7 +1820,7 @@
           <a:p>
             <a:fld id="{9636EE4A-4441-42C2-9290-E89E57CCAC53}" type="datetimeFigureOut">
               <a:rPr lang="en-US" smtClean="0"/>
-              <a:t>12/24/2024</a:t>
+              <a:t>2/2/2026</a:t>
             </a:fld>
             <a:endParaRPr lang="en-US"/>
           </a:p>
@@ -1953,7 +1961,7 @@
           <a:p>
             <a:fld id="{9636EE4A-4441-42C2-9290-E89E57CCAC53}" type="datetimeFigureOut">
               <a:rPr lang="en-US" smtClean="0"/>
-              <a:t>12/24/2024</a:t>
+              <a:t>2/2/2026</a:t>
             </a:fld>
             <a:endParaRPr lang="en-US"/>
           </a:p>
@@ -2066,7 +2074,7 @@
           <a:p>
             <a:fld id="{9636EE4A-4441-42C2-9290-E89E57CCAC53}" type="datetimeFigureOut">
               <a:rPr lang="en-US" smtClean="0"/>
-              <a:t>12/24/2024</a:t>
+              <a:t>2/2/2026</a:t>
             </a:fld>
             <a:endParaRPr lang="en-US"/>
           </a:p>
@@ -2377,7 +2385,7 @@
           <a:p>
             <a:fld id="{9636EE4A-4441-42C2-9290-E89E57CCAC53}" type="datetimeFigureOut">
               <a:rPr lang="en-US" smtClean="0"/>
-              <a:t>12/24/2024</a:t>
+              <a:t>2/2/2026</a:t>
             </a:fld>
             <a:endParaRPr lang="en-US"/>
           </a:p>
@@ -2665,7 +2673,7 @@
           <a:p>
             <a:fld id="{9636EE4A-4441-42C2-9290-E89E57CCAC53}" type="datetimeFigureOut">
               <a:rPr lang="en-US" smtClean="0"/>
-              <a:t>12/24/2024</a:t>
+              <a:t>2/2/2026</a:t>
             </a:fld>
             <a:endParaRPr lang="en-US"/>
           </a:p>
@@ -2906,7 +2914,7 @@
           <a:p>
             <a:fld id="{9636EE4A-4441-42C2-9290-E89E57CCAC53}" type="datetimeFigureOut">
               <a:rPr lang="en-US" smtClean="0"/>
-              <a:t>12/24/2024</a:t>
+              <a:t>2/2/2026</a:t>
             </a:fld>
             <a:endParaRPr lang="en-US"/>
           </a:p>
@@ -3337,8 +3345,8 @@
         </p:nvSpPr>
         <p:spPr>
           <a:xfrm>
-            <a:off x="1858297" y="1258529"/>
-            <a:ext cx="2802193" cy="2031325"/>
+            <a:off x="1848465" y="953730"/>
+            <a:ext cx="2802193" cy="2862322"/>
           </a:xfrm>
           <a:prstGeom prst="rect">
             <a:avLst/>
@@ -3381,6 +3389,15 @@
             <a:endParaRPr lang="en-US" dirty="0"/>
           </a:p>
           <a:p>
+            <a:endParaRPr lang="en-US" dirty="0"/>
+          </a:p>
+          <a:p>
+            <a:endParaRPr lang="en-US" dirty="0"/>
+          </a:p>
+          <a:p>
+            <a:endParaRPr lang="en-US" dirty="0"/>
+          </a:p>
+          <a:p>
             <a:r>
               <a:rPr lang="en-US" dirty="0"/>
               <a:t>Mobile</a:t>
@@ -3402,7 +3419,7 @@
         </p:nvSpPr>
         <p:spPr>
           <a:xfrm>
-            <a:off x="5697794" y="1258529"/>
+            <a:off x="5776452" y="973394"/>
             <a:ext cx="3249561" cy="3139321"/>
           </a:xfrm>
           <a:prstGeom prst="rect">
@@ -3663,7 +3680,7 @@
         </p:nvSpPr>
         <p:spPr>
           <a:xfrm>
-            <a:off x="1524000" y="2320415"/>
+            <a:off x="1546123" y="2469743"/>
             <a:ext cx="1759974" cy="1887791"/>
           </a:xfrm>
           <a:prstGeom prst="rect">
@@ -3710,8 +3727,8 @@
         </p:nvSpPr>
         <p:spPr>
           <a:xfrm>
-            <a:off x="5958349" y="476867"/>
-            <a:ext cx="2517058" cy="1843548"/>
+            <a:off x="5172384" y="419615"/>
+            <a:ext cx="5228306" cy="1885335"/>
           </a:xfrm>
           <a:prstGeom prst="rect">
             <a:avLst/>
@@ -3757,7 +3774,7 @@
         </p:nvSpPr>
         <p:spPr>
           <a:xfrm>
-            <a:off x="4586749" y="4513006"/>
+            <a:off x="4564626" y="4503173"/>
             <a:ext cx="1371600" cy="973394"/>
           </a:xfrm>
           <a:prstGeom prst="rect">
@@ -4055,9 +4072,9 @@
           <p:nvPr/>
         </p:nvCxnSpPr>
         <p:spPr>
-          <a:xfrm flipV="1">
-            <a:off x="7216877" y="2320415"/>
-            <a:ext cx="1" cy="501443"/>
+          <a:xfrm flipH="1" flipV="1">
+            <a:off x="7786537" y="2304950"/>
+            <a:ext cx="222454" cy="459656"/>
           </a:xfrm>
           <a:prstGeom prst="straightConnector1">
             <a:avLst/>
@@ -4098,7 +4115,7 @@
         </p:nvCxnSpPr>
         <p:spPr>
           <a:xfrm>
-            <a:off x="5272549" y="3706761"/>
+            <a:off x="5250426" y="3696928"/>
             <a:ext cx="0" cy="806245"/>
           </a:xfrm>
           <a:prstGeom prst="straightConnector1">
@@ -4523,8 +4540,8 @@
         </p:nvSpPr>
         <p:spPr>
           <a:xfrm>
-            <a:off x="1622322" y="4485968"/>
-            <a:ext cx="2278627" cy="2310580"/>
+            <a:off x="1494505" y="4485968"/>
+            <a:ext cx="2278627" cy="2310578"/>
           </a:xfrm>
           <a:prstGeom prst="rect">
             <a:avLst/>
@@ -4571,8 +4588,8 @@
         </p:nvCxnSpPr>
         <p:spPr>
           <a:xfrm>
-            <a:off x="2403987" y="4208206"/>
-            <a:ext cx="357649" cy="277762"/>
+            <a:off x="2426110" y="4357534"/>
+            <a:ext cx="207709" cy="128434"/>
           </a:xfrm>
           <a:prstGeom prst="straightConnector1">
             <a:avLst/>
@@ -4610,7 +4627,7 @@
         </p:nvSpPr>
         <p:spPr>
           <a:xfrm>
-            <a:off x="2208570" y="4847305"/>
+            <a:off x="2148350" y="4742836"/>
             <a:ext cx="970938" cy="462116"/>
           </a:xfrm>
           <a:prstGeom prst="rect">
@@ -4659,8 +4676,8 @@
         </p:nvSpPr>
         <p:spPr>
           <a:xfrm>
-            <a:off x="2208570" y="5410200"/>
-            <a:ext cx="970938" cy="462116"/>
+            <a:off x="2088128" y="5348748"/>
+            <a:ext cx="1193390" cy="462116"/>
           </a:xfrm>
           <a:prstGeom prst="rect">
             <a:avLst/>
@@ -4695,8 +4712,19 @@
             <a:pPr algn="ctr"/>
             <a:r>
               <a:rPr lang="en-US" dirty="0"/>
-              <a:t>CU</a:t>
-            </a:r>
+              <a:t>CU:</a:t>
+            </a:r>
+          </a:p>
+          <a:p>
+            <a:pPr algn="ctr"/>
+            <a:r>
+              <a:rPr lang="en-US" dirty="0"/>
+              <a:t>X = x * 5;</a:t>
+            </a:r>
+          </a:p>
+          <a:p>
+            <a:pPr algn="ctr"/>
+            <a:endParaRPr lang="en-US" dirty="0"/>
           </a:p>
         </p:txBody>
       </p:sp>
@@ -4714,8 +4742,8 @@
         </p:nvSpPr>
         <p:spPr>
           <a:xfrm>
-            <a:off x="2015613" y="6037009"/>
-            <a:ext cx="1386347" cy="532168"/>
+            <a:off x="1819588" y="5948516"/>
+            <a:ext cx="1730470" cy="820991"/>
           </a:xfrm>
           <a:prstGeom prst="rect">
             <a:avLst/>
@@ -4750,8 +4778,820 @@
             <a:pPr algn="ctr"/>
             <a:r>
               <a:rPr lang="en-US" dirty="0"/>
-              <a:t>Private memory</a:t>
-            </a:r>
+              <a:t>CPU memory</a:t>
+            </a:r>
+          </a:p>
+          <a:p>
+            <a:pPr algn="ctr"/>
+            <a:r>
+              <a:rPr lang="en-US" dirty="0"/>
+              <a:t>100byte</a:t>
+            </a:r>
+          </a:p>
+        </p:txBody>
+      </p:sp>
+      <p:sp>
+        <p:nvSpPr>
+          <p:cNvPr id="10" name="TextBox 9">
+            <a:extLst>
+              <a:ext uri="{FF2B5EF4-FFF2-40B4-BE49-F238E27FC236}">
+                <a16:creationId xmlns:a16="http://schemas.microsoft.com/office/drawing/2014/main" id="{22930178-65CC-AC7F-AA00-5D9CCBA72D24}"/>
+              </a:ext>
+            </a:extLst>
+          </p:cNvPr>
+          <p:cNvSpPr txBox="1"/>
+          <p:nvPr/>
+        </p:nvSpPr>
+        <p:spPr>
+          <a:xfrm>
+            <a:off x="764460" y="-51615"/>
+            <a:ext cx="3274142" cy="2031325"/>
+          </a:xfrm>
+          <a:prstGeom prst="rect">
+            <a:avLst/>
+          </a:prstGeom>
+          <a:noFill/>
+        </p:spPr>
+        <p:txBody>
+          <a:bodyPr wrap="square" rtlCol="0">
+            <a:spAutoFit/>
+          </a:bodyPr>
+          <a:lstStyle/>
+          <a:p>
+            <a:r>
+              <a:rPr lang="en-US" dirty="0"/>
+              <a:t>Central Processing Unit: 2.5 + 4.5</a:t>
+            </a:r>
+          </a:p>
+          <a:p>
+            <a:endParaRPr lang="en-US" dirty="0"/>
+          </a:p>
+          <a:p>
+            <a:r>
+              <a:rPr lang="en-US" dirty="0"/>
+              <a:t>Arithmetic Logic Unit: +, -, *, /, &lt;&lt;, &gt;&gt;</a:t>
+            </a:r>
+          </a:p>
+          <a:p>
+            <a:r>
+              <a:rPr lang="en-US" dirty="0"/>
+              <a:t>Control Unit</a:t>
+            </a:r>
+          </a:p>
+          <a:p>
+            <a:r>
+              <a:rPr lang="en-US" dirty="0"/>
+              <a:t>CPU memory</a:t>
+            </a:r>
+          </a:p>
+        </p:txBody>
+      </p:sp>
+      <p:sp>
+        <p:nvSpPr>
+          <p:cNvPr id="18" name="Rectangle 17">
+            <a:extLst>
+              <a:ext uri="{FF2B5EF4-FFF2-40B4-BE49-F238E27FC236}">
+                <a16:creationId xmlns:a16="http://schemas.microsoft.com/office/drawing/2014/main" id="{103BAD8A-6F13-27D9-3E86-33C4B886C878}"/>
+              </a:ext>
+            </a:extLst>
+          </p:cNvPr>
+          <p:cNvSpPr/>
+          <p:nvPr/>
+        </p:nvSpPr>
+        <p:spPr>
+          <a:xfrm>
+            <a:off x="5240593" y="560439"/>
+            <a:ext cx="1897627" cy="941433"/>
+          </a:xfrm>
+          <a:prstGeom prst="rect">
+            <a:avLst/>
+          </a:prstGeom>
+        </p:spPr>
+        <p:style>
+          <a:lnRef idx="2">
+            <a:schemeClr val="accent6">
+              <a:shade val="15000"/>
+            </a:schemeClr>
+          </a:lnRef>
+          <a:fillRef idx="1">
+            <a:schemeClr val="accent6"/>
+          </a:fillRef>
+          <a:effectRef idx="0">
+            <a:schemeClr val="accent6"/>
+          </a:effectRef>
+          <a:fontRef idx="minor">
+            <a:schemeClr val="lt1"/>
+          </a:fontRef>
+        </p:style>
+        <p:txBody>
+          <a:bodyPr rtlCol="0" anchor="ctr"/>
+          <a:lstStyle/>
+          <a:p>
+            <a:pPr algn="ctr"/>
+            <a:r>
+              <a:rPr lang="en-US" dirty="0"/>
+              <a:t>Text</a:t>
+            </a:r>
+          </a:p>
+          <a:p>
+            <a:pPr algn="ctr"/>
+            <a:r>
+              <a:rPr lang="en-US" dirty="0"/>
+              <a:t>Int x = 5;</a:t>
+            </a:r>
+          </a:p>
+          <a:p>
+            <a:pPr algn="ctr"/>
+            <a:r>
+              <a:rPr lang="en-US" dirty="0"/>
+              <a:t>X = x + 2;</a:t>
+            </a:r>
+          </a:p>
+          <a:p>
+            <a:pPr algn="ctr"/>
+            <a:endParaRPr lang="en-US" dirty="0"/>
+          </a:p>
+        </p:txBody>
+      </p:sp>
+      <p:sp>
+        <p:nvSpPr>
+          <p:cNvPr id="20" name="Rectangle 19">
+            <a:extLst>
+              <a:ext uri="{FF2B5EF4-FFF2-40B4-BE49-F238E27FC236}">
+                <a16:creationId xmlns:a16="http://schemas.microsoft.com/office/drawing/2014/main" id="{15AF5BD4-734E-5D25-7767-E763E5318549}"/>
+              </a:ext>
+            </a:extLst>
+          </p:cNvPr>
+          <p:cNvSpPr/>
+          <p:nvPr/>
+        </p:nvSpPr>
+        <p:spPr>
+          <a:xfrm>
+            <a:off x="7342239" y="721449"/>
+            <a:ext cx="1042219" cy="698083"/>
+          </a:xfrm>
+          <a:prstGeom prst="rect">
+            <a:avLst/>
+          </a:prstGeom>
+        </p:spPr>
+        <p:style>
+          <a:lnRef idx="2">
+            <a:schemeClr val="accent2">
+              <a:shade val="15000"/>
+            </a:schemeClr>
+          </a:lnRef>
+          <a:fillRef idx="1">
+            <a:schemeClr val="accent2"/>
+          </a:fillRef>
+          <a:effectRef idx="0">
+            <a:schemeClr val="accent2"/>
+          </a:effectRef>
+          <a:fontRef idx="minor">
+            <a:schemeClr val="lt1"/>
+          </a:fontRef>
+        </p:style>
+        <p:txBody>
+          <a:bodyPr rtlCol="0" anchor="ctr"/>
+          <a:lstStyle/>
+          <a:p>
+            <a:pPr algn="ctr"/>
+            <a:r>
+              <a:rPr lang="en-US" dirty="0"/>
+              <a:t>data</a:t>
+            </a:r>
+          </a:p>
+        </p:txBody>
+      </p:sp>
+      <p:sp>
+        <p:nvSpPr>
+          <p:cNvPr id="22" name="Rectangle 21">
+            <a:extLst>
+              <a:ext uri="{FF2B5EF4-FFF2-40B4-BE49-F238E27FC236}">
+                <a16:creationId xmlns:a16="http://schemas.microsoft.com/office/drawing/2014/main" id="{AA082570-68E1-AD7A-709F-E2C591E1BF18}"/>
+              </a:ext>
+            </a:extLst>
+          </p:cNvPr>
+          <p:cNvSpPr/>
+          <p:nvPr/>
+        </p:nvSpPr>
+        <p:spPr>
+          <a:xfrm>
+            <a:off x="8676966" y="757083"/>
+            <a:ext cx="1042219" cy="698083"/>
+          </a:xfrm>
+          <a:prstGeom prst="rect">
+            <a:avLst/>
+          </a:prstGeom>
+        </p:spPr>
+        <p:style>
+          <a:lnRef idx="2">
+            <a:schemeClr val="accent2">
+              <a:shade val="15000"/>
+            </a:schemeClr>
+          </a:lnRef>
+          <a:fillRef idx="1">
+            <a:schemeClr val="accent2"/>
+          </a:fillRef>
+          <a:effectRef idx="0">
+            <a:schemeClr val="accent2"/>
+          </a:effectRef>
+          <a:fontRef idx="minor">
+            <a:schemeClr val="lt1"/>
+          </a:fontRef>
+        </p:style>
+        <p:txBody>
+          <a:bodyPr rtlCol="0" anchor="ctr"/>
+          <a:lstStyle/>
+          <a:p>
+            <a:pPr algn="ctr"/>
+            <a:r>
+              <a:rPr lang="en-US" dirty="0" err="1"/>
+              <a:t>bss</a:t>
+            </a:r>
+            <a:endParaRPr lang="en-US" dirty="0"/>
+          </a:p>
+        </p:txBody>
+      </p:sp>
+      <p:sp>
+        <p:nvSpPr>
+          <p:cNvPr id="24" name="Rectangle 23">
+            <a:extLst>
+              <a:ext uri="{FF2B5EF4-FFF2-40B4-BE49-F238E27FC236}">
+                <a16:creationId xmlns:a16="http://schemas.microsoft.com/office/drawing/2014/main" id="{5AE62AB5-53E8-10B4-F51C-A6C59B91E75F}"/>
+              </a:ext>
+            </a:extLst>
+          </p:cNvPr>
+          <p:cNvSpPr/>
+          <p:nvPr/>
+        </p:nvSpPr>
+        <p:spPr>
+          <a:xfrm>
+            <a:off x="5545394" y="1651827"/>
+            <a:ext cx="1623551" cy="698083"/>
+          </a:xfrm>
+          <a:prstGeom prst="rect">
+            <a:avLst/>
+          </a:prstGeom>
+        </p:spPr>
+        <p:style>
+          <a:lnRef idx="2">
+            <a:schemeClr val="accent3">
+              <a:shade val="15000"/>
+            </a:schemeClr>
+          </a:lnRef>
+          <a:fillRef idx="1">
+            <a:schemeClr val="accent3"/>
+          </a:fillRef>
+          <a:effectRef idx="0">
+            <a:schemeClr val="accent3"/>
+          </a:effectRef>
+          <a:fontRef idx="minor">
+            <a:schemeClr val="lt1"/>
+          </a:fontRef>
+        </p:style>
+        <p:txBody>
+          <a:bodyPr rtlCol="0" anchor="ctr"/>
+          <a:lstStyle/>
+          <a:p>
+            <a:pPr algn="ctr"/>
+            <a:r>
+              <a:rPr lang="en-US" dirty="0"/>
+              <a:t>stack</a:t>
+            </a:r>
+          </a:p>
+        </p:txBody>
+      </p:sp>
+      <p:sp>
+        <p:nvSpPr>
+          <p:cNvPr id="25" name="Rectangle 24">
+            <a:extLst>
+              <a:ext uri="{FF2B5EF4-FFF2-40B4-BE49-F238E27FC236}">
+                <a16:creationId xmlns:a16="http://schemas.microsoft.com/office/drawing/2014/main" id="{07886538-D69E-5943-DA60-D75A560779E5}"/>
+              </a:ext>
+            </a:extLst>
+          </p:cNvPr>
+          <p:cNvSpPr/>
+          <p:nvPr/>
+        </p:nvSpPr>
+        <p:spPr>
+          <a:xfrm>
+            <a:off x="7639051" y="1592307"/>
+            <a:ext cx="1042219" cy="698083"/>
+          </a:xfrm>
+          <a:prstGeom prst="rect">
+            <a:avLst/>
+          </a:prstGeom>
+        </p:spPr>
+        <p:style>
+          <a:lnRef idx="2">
+            <a:schemeClr val="accent3">
+              <a:shade val="15000"/>
+            </a:schemeClr>
+          </a:lnRef>
+          <a:fillRef idx="1">
+            <a:schemeClr val="accent3"/>
+          </a:fillRef>
+          <a:effectRef idx="0">
+            <a:schemeClr val="accent3"/>
+          </a:effectRef>
+          <a:fontRef idx="minor">
+            <a:schemeClr val="lt1"/>
+          </a:fontRef>
+        </p:style>
+        <p:txBody>
+          <a:bodyPr rtlCol="0" anchor="ctr"/>
+          <a:lstStyle/>
+          <a:p>
+            <a:pPr algn="ctr"/>
+            <a:r>
+              <a:rPr lang="en-US" dirty="0"/>
+              <a:t>heap</a:t>
+            </a:r>
+          </a:p>
+        </p:txBody>
+      </p:sp>
+      <p:sp>
+        <p:nvSpPr>
+          <p:cNvPr id="27" name="Rectangle 26">
+            <a:extLst>
+              <a:ext uri="{FF2B5EF4-FFF2-40B4-BE49-F238E27FC236}">
+                <a16:creationId xmlns:a16="http://schemas.microsoft.com/office/drawing/2014/main" id="{188305E3-C193-71A5-7B22-1AABEA3FAC94}"/>
+              </a:ext>
+            </a:extLst>
+          </p:cNvPr>
+          <p:cNvSpPr/>
+          <p:nvPr/>
+        </p:nvSpPr>
+        <p:spPr>
+          <a:xfrm>
+            <a:off x="6529544" y="1723114"/>
+            <a:ext cx="608676" cy="277754"/>
+          </a:xfrm>
+          <a:prstGeom prst="rect">
+            <a:avLst/>
+          </a:prstGeom>
+        </p:spPr>
+        <p:style>
+          <a:lnRef idx="2">
+            <a:schemeClr val="accent5">
+              <a:shade val="15000"/>
+            </a:schemeClr>
+          </a:lnRef>
+          <a:fillRef idx="1">
+            <a:schemeClr val="accent5"/>
+          </a:fillRef>
+          <a:effectRef idx="0">
+            <a:schemeClr val="accent5"/>
+          </a:effectRef>
+          <a:fontRef idx="minor">
+            <a:schemeClr val="lt1"/>
+          </a:fontRef>
+        </p:style>
+        <p:txBody>
+          <a:bodyPr rtlCol="0" anchor="ctr"/>
+          <a:lstStyle/>
+          <a:p>
+            <a:pPr algn="ctr"/>
+            <a:r>
+              <a:rPr lang="en-US" dirty="0"/>
+              <a:t>35</a:t>
+            </a:r>
+          </a:p>
+        </p:txBody>
+      </p:sp>
+      <p:cxnSp>
+        <p:nvCxnSpPr>
+          <p:cNvPr id="31" name="Straight Arrow Connector 30">
+            <a:extLst>
+              <a:ext uri="{FF2B5EF4-FFF2-40B4-BE49-F238E27FC236}">
+                <a16:creationId xmlns:a16="http://schemas.microsoft.com/office/drawing/2014/main" id="{F7894027-2E51-7C74-E463-3DFDBDE467AE}"/>
+              </a:ext>
+            </a:extLst>
+          </p:cNvPr>
+          <p:cNvCxnSpPr/>
+          <p:nvPr/>
+        </p:nvCxnSpPr>
+        <p:spPr>
+          <a:xfrm flipV="1">
+            <a:off x="2633819" y="5164394"/>
+            <a:ext cx="0" cy="245806"/>
+          </a:xfrm>
+          <a:prstGeom prst="straightConnector1">
+            <a:avLst/>
+          </a:prstGeom>
+          <a:ln>
+            <a:tailEnd type="triangle"/>
+          </a:ln>
+        </p:spPr>
+        <p:style>
+          <a:lnRef idx="2">
+            <a:schemeClr val="accent1"/>
+          </a:lnRef>
+          <a:fillRef idx="0">
+            <a:schemeClr val="accent1"/>
+          </a:fillRef>
+          <a:effectRef idx="1">
+            <a:schemeClr val="accent1"/>
+          </a:effectRef>
+          <a:fontRef idx="minor">
+            <a:schemeClr val="tx1"/>
+          </a:fontRef>
+        </p:style>
+      </p:cxnSp>
+      <p:cxnSp>
+        <p:nvCxnSpPr>
+          <p:cNvPr id="33" name="Straight Arrow Connector 32">
+            <a:extLst>
+              <a:ext uri="{FF2B5EF4-FFF2-40B4-BE49-F238E27FC236}">
+                <a16:creationId xmlns:a16="http://schemas.microsoft.com/office/drawing/2014/main" id="{3D180B13-E322-D2D6-BD7F-EA1AD1EB97D4}"/>
+              </a:ext>
+            </a:extLst>
+          </p:cNvPr>
+          <p:cNvCxnSpPr/>
+          <p:nvPr/>
+        </p:nvCxnSpPr>
+        <p:spPr>
+          <a:xfrm flipV="1">
+            <a:off x="3097161" y="5164394"/>
+            <a:ext cx="0" cy="245806"/>
+          </a:xfrm>
+          <a:prstGeom prst="straightConnector1">
+            <a:avLst/>
+          </a:prstGeom>
+          <a:ln>
+            <a:tailEnd type="triangle"/>
+          </a:ln>
+        </p:spPr>
+        <p:style>
+          <a:lnRef idx="2">
+            <a:schemeClr val="accent1"/>
+          </a:lnRef>
+          <a:fillRef idx="0">
+            <a:schemeClr val="accent1"/>
+          </a:fillRef>
+          <a:effectRef idx="1">
+            <a:schemeClr val="accent1"/>
+          </a:effectRef>
+          <a:fontRef idx="minor">
+            <a:schemeClr val="tx1"/>
+          </a:fontRef>
+        </p:style>
+      </p:cxnSp>
+      <p:cxnSp>
+        <p:nvCxnSpPr>
+          <p:cNvPr id="38" name="Straight Arrow Connector 37">
+            <a:extLst>
+              <a:ext uri="{FF2B5EF4-FFF2-40B4-BE49-F238E27FC236}">
+                <a16:creationId xmlns:a16="http://schemas.microsoft.com/office/drawing/2014/main" id="{0BBDD555-5024-B6D3-F059-75FBCC31E822}"/>
+              </a:ext>
+            </a:extLst>
+          </p:cNvPr>
+          <p:cNvCxnSpPr>
+            <a:stCxn id="47" idx="1"/>
+          </p:cNvCxnSpPr>
+          <p:nvPr/>
+        </p:nvCxnSpPr>
+        <p:spPr>
+          <a:xfrm>
+            <a:off x="2148350" y="4973894"/>
+            <a:ext cx="0" cy="553064"/>
+          </a:xfrm>
+          <a:prstGeom prst="straightConnector1">
+            <a:avLst/>
+          </a:prstGeom>
+          <a:ln>
+            <a:tailEnd type="triangle"/>
+          </a:ln>
+        </p:spPr>
+        <p:style>
+          <a:lnRef idx="2">
+            <a:schemeClr val="accent1"/>
+          </a:lnRef>
+          <a:fillRef idx="0">
+            <a:schemeClr val="accent1"/>
+          </a:fillRef>
+          <a:effectRef idx="1">
+            <a:schemeClr val="accent1"/>
+          </a:effectRef>
+          <a:fontRef idx="minor">
+            <a:schemeClr val="tx1"/>
+          </a:fontRef>
+        </p:style>
+      </p:cxnSp>
+      <p:sp>
+        <p:nvSpPr>
+          <p:cNvPr id="44" name="TextBox 43">
+            <a:extLst>
+              <a:ext uri="{FF2B5EF4-FFF2-40B4-BE49-F238E27FC236}">
+                <a16:creationId xmlns:a16="http://schemas.microsoft.com/office/drawing/2014/main" id="{B9F9257E-406B-4136-6F61-A3DAE2843EEC}"/>
+              </a:ext>
+            </a:extLst>
+          </p:cNvPr>
+          <p:cNvSpPr txBox="1"/>
+          <p:nvPr/>
+        </p:nvSpPr>
+        <p:spPr>
+          <a:xfrm>
+            <a:off x="8986680" y="27351"/>
+            <a:ext cx="3323304" cy="2308324"/>
+          </a:xfrm>
+          <a:prstGeom prst="rect">
+            <a:avLst/>
+          </a:prstGeom>
+          <a:noFill/>
+        </p:spPr>
+        <p:txBody>
+          <a:bodyPr wrap="square" rtlCol="0">
+            <a:spAutoFit/>
+          </a:bodyPr>
+          <a:lstStyle/>
+          <a:p>
+            <a:pPr marL="342900" indent="-342900">
+              <a:buAutoNum type="arabicPeriod"/>
+            </a:pPr>
+            <a:r>
+              <a:rPr lang="en-US" dirty="0" err="1"/>
+              <a:t>lệnh</a:t>
+            </a:r>
+            <a:r>
+              <a:rPr lang="en-US" dirty="0"/>
+              <a:t>: </a:t>
+            </a:r>
+            <a:r>
+              <a:rPr lang="en-US" dirty="0" err="1"/>
+              <a:t>lưu</a:t>
+            </a:r>
+            <a:r>
+              <a:rPr lang="en-US" dirty="0"/>
+              <a:t> </a:t>
+            </a:r>
+            <a:r>
+              <a:rPr lang="en-US" dirty="0" err="1"/>
+              <a:t>trên</a:t>
+            </a:r>
+            <a:r>
+              <a:rPr lang="en-US" dirty="0"/>
+              <a:t> </a:t>
+            </a:r>
+            <a:r>
+              <a:rPr lang="en-US" dirty="0" err="1"/>
+              <a:t>ssd</a:t>
+            </a:r>
+            <a:r>
+              <a:rPr lang="en-US" dirty="0"/>
+              <a:t>/</a:t>
+            </a:r>
+            <a:r>
+              <a:rPr lang="en-US" dirty="0" err="1"/>
+              <a:t>hdd</a:t>
+            </a:r>
+            <a:r>
+              <a:rPr lang="en-US" dirty="0"/>
+              <a:t> (</a:t>
+            </a:r>
+            <a:r>
+              <a:rPr lang="en-US" dirty="0" err="1"/>
+              <a:t>khi</a:t>
+            </a:r>
+            <a:r>
+              <a:rPr lang="en-US" dirty="0"/>
+              <a:t> </a:t>
+            </a:r>
+            <a:r>
+              <a:rPr lang="en-US" dirty="0" err="1"/>
+              <a:t>chưa</a:t>
+            </a:r>
+            <a:r>
+              <a:rPr lang="en-US" dirty="0"/>
+              <a:t> </a:t>
+            </a:r>
+            <a:r>
+              <a:rPr lang="en-US" dirty="0" err="1"/>
+              <a:t>chạy</a:t>
+            </a:r>
+            <a:r>
+              <a:rPr lang="en-US" dirty="0"/>
+              <a:t> </a:t>
+            </a:r>
+            <a:r>
+              <a:rPr lang="en-US" dirty="0" err="1"/>
+              <a:t>chương</a:t>
+            </a:r>
+            <a:r>
+              <a:rPr lang="en-US" dirty="0"/>
+              <a:t> </a:t>
+            </a:r>
+            <a:r>
+              <a:rPr lang="en-US" dirty="0" err="1"/>
+              <a:t>trình</a:t>
+            </a:r>
+            <a:r>
+              <a:rPr lang="en-US" dirty="0"/>
+              <a:t>)</a:t>
+            </a:r>
+          </a:p>
+          <a:p>
+            <a:pPr marL="342900" indent="-342900">
+              <a:buAutoNum type="arabicPeriod"/>
+            </a:pPr>
+            <a:r>
+              <a:rPr lang="en-US" dirty="0"/>
+              <a:t>Khi </a:t>
+            </a:r>
+            <a:r>
+              <a:rPr lang="en-US" dirty="0" err="1"/>
+              <a:t>chạy</a:t>
+            </a:r>
+            <a:r>
+              <a:rPr lang="en-US" dirty="0"/>
+              <a:t> </a:t>
+            </a:r>
+            <a:r>
+              <a:rPr lang="en-US" dirty="0" err="1"/>
+              <a:t>chương</a:t>
+            </a:r>
+            <a:r>
+              <a:rPr lang="en-US" dirty="0"/>
+              <a:t> </a:t>
+            </a:r>
+            <a:r>
+              <a:rPr lang="en-US" dirty="0" err="1"/>
+              <a:t>trình</a:t>
+            </a:r>
+            <a:r>
+              <a:rPr lang="en-US" dirty="0"/>
+              <a:t>: </a:t>
+            </a:r>
+            <a:r>
+              <a:rPr lang="en-US" dirty="0" err="1"/>
+              <a:t>nằm</a:t>
+            </a:r>
+            <a:r>
+              <a:rPr lang="en-US" dirty="0"/>
+              <a:t> ở </a:t>
+            </a:r>
+            <a:r>
+              <a:rPr lang="en-US" dirty="0" err="1"/>
+              <a:t>vùng</a:t>
+            </a:r>
+            <a:r>
+              <a:rPr lang="en-US" dirty="0"/>
+              <a:t> text </a:t>
+            </a:r>
+            <a:r>
+              <a:rPr lang="en-US" dirty="0" err="1"/>
+              <a:t>của</a:t>
+            </a:r>
+            <a:r>
+              <a:rPr lang="en-US" dirty="0"/>
+              <a:t> RAM</a:t>
+            </a:r>
+          </a:p>
+          <a:p>
+            <a:pPr marL="342900" indent="-342900">
+              <a:buAutoNum type="arabicPeriod"/>
+            </a:pPr>
+            <a:r>
+              <a:rPr lang="en-US" dirty="0" err="1"/>
+              <a:t>Lệnh</a:t>
+            </a:r>
+            <a:r>
+              <a:rPr lang="en-US" dirty="0"/>
+              <a:t> </a:t>
+            </a:r>
+            <a:r>
+              <a:rPr lang="en-US" dirty="0" err="1"/>
+              <a:t>được</a:t>
+            </a:r>
+            <a:r>
+              <a:rPr lang="en-US" dirty="0"/>
+              <a:t> </a:t>
+            </a:r>
+            <a:r>
+              <a:rPr lang="en-US" dirty="0" err="1"/>
+              <a:t>thực</a:t>
+            </a:r>
+            <a:r>
+              <a:rPr lang="en-US" dirty="0"/>
+              <a:t> </a:t>
+            </a:r>
+            <a:r>
+              <a:rPr lang="en-US" dirty="0" err="1"/>
+              <a:t>thi</a:t>
+            </a:r>
+            <a:r>
+              <a:rPr lang="en-US" dirty="0"/>
+              <a:t> ở CU (CPU)</a:t>
+            </a:r>
+          </a:p>
+          <a:p>
+            <a:pPr marL="342900" indent="-342900">
+              <a:buAutoNum type="arabicPeriod"/>
+            </a:pPr>
+            <a:endParaRPr lang="en-US" dirty="0"/>
+          </a:p>
+          <a:p>
+            <a:pPr marL="342900" indent="-342900">
+              <a:buAutoNum type="arabicPeriod"/>
+            </a:pPr>
+            <a:endParaRPr lang="en-US" dirty="0"/>
+          </a:p>
+        </p:txBody>
+      </p:sp>
+      <p:sp>
+        <p:nvSpPr>
+          <p:cNvPr id="50" name="TextBox 49">
+            <a:extLst>
+              <a:ext uri="{FF2B5EF4-FFF2-40B4-BE49-F238E27FC236}">
+                <a16:creationId xmlns:a16="http://schemas.microsoft.com/office/drawing/2014/main" id="{38F39458-3DBD-23D6-755A-A0D72B39852A}"/>
+              </a:ext>
+            </a:extLst>
+          </p:cNvPr>
+          <p:cNvSpPr txBox="1"/>
+          <p:nvPr/>
+        </p:nvSpPr>
+        <p:spPr>
+          <a:xfrm>
+            <a:off x="4366755" y="5592237"/>
+            <a:ext cx="2223015" cy="646331"/>
+          </a:xfrm>
+          <a:prstGeom prst="rect">
+            <a:avLst/>
+          </a:prstGeom>
+          <a:noFill/>
+        </p:spPr>
+        <p:txBody>
+          <a:bodyPr wrap="square" rtlCol="0">
+            <a:spAutoFit/>
+          </a:bodyPr>
+          <a:lstStyle/>
+          <a:p>
+            <a:r>
+              <a:rPr lang="en-US" dirty="0"/>
+              <a:t>RAM: random access memory</a:t>
+            </a:r>
+          </a:p>
+        </p:txBody>
+      </p:sp>
+      <p:sp>
+        <p:nvSpPr>
+          <p:cNvPr id="52" name="TextBox 51">
+            <a:extLst>
+              <a:ext uri="{FF2B5EF4-FFF2-40B4-BE49-F238E27FC236}">
+                <a16:creationId xmlns:a16="http://schemas.microsoft.com/office/drawing/2014/main" id="{F4AC0FD9-97F0-488C-65B2-F1D6A108EC6D}"/>
+              </a:ext>
+            </a:extLst>
+          </p:cNvPr>
+          <p:cNvSpPr txBox="1"/>
+          <p:nvPr/>
+        </p:nvSpPr>
+        <p:spPr>
+          <a:xfrm>
+            <a:off x="6690389" y="5700389"/>
+            <a:ext cx="2561768" cy="923330"/>
+          </a:xfrm>
+          <a:prstGeom prst="rect">
+            <a:avLst/>
+          </a:prstGeom>
+          <a:noFill/>
+        </p:spPr>
+        <p:txBody>
+          <a:bodyPr wrap="square" rtlCol="0">
+            <a:spAutoFit/>
+          </a:bodyPr>
+          <a:lstStyle/>
+          <a:p>
+            <a:r>
+              <a:rPr lang="en-US" dirty="0"/>
+              <a:t>ROM: read-only memory</a:t>
+            </a:r>
+          </a:p>
+          <a:p>
+            <a:r>
+              <a:rPr lang="en-US" dirty="0"/>
+              <a:t>Flash: </a:t>
+            </a:r>
+            <a:r>
+              <a:rPr lang="en-US" dirty="0" err="1"/>
+              <a:t>lưu</a:t>
+            </a:r>
+            <a:r>
+              <a:rPr lang="en-US" dirty="0"/>
+              <a:t> </a:t>
+            </a:r>
+            <a:r>
+              <a:rPr lang="en-US" dirty="0" err="1"/>
+              <a:t>chương</a:t>
+            </a:r>
+            <a:r>
+              <a:rPr lang="en-US" dirty="0"/>
+              <a:t> </a:t>
+            </a:r>
+            <a:r>
+              <a:rPr lang="en-US" dirty="0" err="1"/>
+              <a:t>trình</a:t>
+            </a:r>
+            <a:endParaRPr lang="en-US" dirty="0"/>
           </a:p>
         </p:txBody>
       </p:sp>
@@ -4759,6 +5599,3805 @@
     <p:extLst>
       <p:ext uri="{BB962C8B-B14F-4D97-AF65-F5344CB8AC3E}">
         <p14:creationId xmlns:p14="http://schemas.microsoft.com/office/powerpoint/2010/main" val="2768393982"/>
+      </p:ext>
+    </p:extLst>
+  </p:cSld>
+  <p:clrMapOvr>
+    <a:masterClrMapping/>
+  </p:clrMapOvr>
+</p:sld>
+</file>
+
+<file path=ppt/slides/slide4.xml><?xml version="1.0" encoding="utf-8"?>
+<p:sld xmlns:a="http://schemas.openxmlformats.org/drawingml/2006/main" xmlns:r="http://schemas.openxmlformats.org/officeDocument/2006/relationships" xmlns:p="http://schemas.openxmlformats.org/presentationml/2006/main">
+  <p:cSld>
+    <p:spTree>
+      <p:nvGrpSpPr>
+        <p:cNvPr id="1" name="">
+          <a:extLst>
+            <a:ext uri="{FF2B5EF4-FFF2-40B4-BE49-F238E27FC236}">
+              <a16:creationId xmlns:a16="http://schemas.microsoft.com/office/drawing/2014/main" id="{0BC279C4-0DA6-1514-25EC-942F884FD1E0}"/>
+            </a:ext>
+          </a:extLst>
+        </p:cNvPr>
+        <p:cNvGrpSpPr/>
+        <p:nvPr/>
+      </p:nvGrpSpPr>
+      <p:grpSpPr>
+        <a:xfrm>
+          <a:off x="0" y="0"/>
+          <a:ext cx="0" cy="0"/>
+          <a:chOff x="0" y="0"/>
+          <a:chExt cx="0" cy="0"/>
+        </a:xfrm>
+      </p:grpSpPr>
+      <p:sp>
+        <p:nvSpPr>
+          <p:cNvPr id="4" name="Rectangle 3">
+            <a:extLst>
+              <a:ext uri="{FF2B5EF4-FFF2-40B4-BE49-F238E27FC236}">
+                <a16:creationId xmlns:a16="http://schemas.microsoft.com/office/drawing/2014/main" id="{74482B6E-96D1-AB59-84F8-135C7CFA9D9B}"/>
+              </a:ext>
+            </a:extLst>
+          </p:cNvPr>
+          <p:cNvSpPr/>
+          <p:nvPr/>
+        </p:nvSpPr>
+        <p:spPr>
+          <a:xfrm>
+            <a:off x="943896" y="806244"/>
+            <a:ext cx="4168877" cy="1258529"/>
+          </a:xfrm>
+          <a:prstGeom prst="rect">
+            <a:avLst/>
+          </a:prstGeom>
+        </p:spPr>
+        <p:style>
+          <a:lnRef idx="2">
+            <a:schemeClr val="accent1">
+              <a:shade val="15000"/>
+            </a:schemeClr>
+          </a:lnRef>
+          <a:fillRef idx="1">
+            <a:schemeClr val="accent1"/>
+          </a:fillRef>
+          <a:effectRef idx="0">
+            <a:schemeClr val="accent1"/>
+          </a:effectRef>
+          <a:fontRef idx="minor">
+            <a:schemeClr val="lt1"/>
+          </a:fontRef>
+        </p:style>
+        <p:txBody>
+          <a:bodyPr rtlCol="0" anchor="ctr"/>
+          <a:lstStyle/>
+          <a:p>
+            <a:pPr algn="ctr"/>
+            <a:r>
+              <a:rPr lang="en-US" dirty="0"/>
+              <a:t>ST</a:t>
+            </a:r>
+          </a:p>
+        </p:txBody>
+      </p:sp>
+      <p:sp>
+        <p:nvSpPr>
+          <p:cNvPr id="5" name="Rectangle 4">
+            <a:extLst>
+              <a:ext uri="{FF2B5EF4-FFF2-40B4-BE49-F238E27FC236}">
+                <a16:creationId xmlns:a16="http://schemas.microsoft.com/office/drawing/2014/main" id="{2B6E42A7-2D58-F1B9-4D3C-244E6F240F19}"/>
+              </a:ext>
+            </a:extLst>
+          </p:cNvPr>
+          <p:cNvSpPr/>
+          <p:nvPr/>
+        </p:nvSpPr>
+        <p:spPr>
+          <a:xfrm>
+            <a:off x="1081548" y="2636272"/>
+            <a:ext cx="3421626" cy="1258529"/>
+          </a:xfrm>
+          <a:prstGeom prst="rect">
+            <a:avLst/>
+          </a:prstGeom>
+        </p:spPr>
+        <p:style>
+          <a:lnRef idx="2">
+            <a:schemeClr val="accent2">
+              <a:shade val="15000"/>
+            </a:schemeClr>
+          </a:lnRef>
+          <a:fillRef idx="1">
+            <a:schemeClr val="accent2"/>
+          </a:fillRef>
+          <a:effectRef idx="0">
+            <a:schemeClr val="accent2"/>
+          </a:effectRef>
+          <a:fontRef idx="minor">
+            <a:schemeClr val="lt1"/>
+          </a:fontRef>
+        </p:style>
+        <p:txBody>
+          <a:bodyPr rtlCol="0" anchor="ctr"/>
+          <a:lstStyle/>
+          <a:p>
+            <a:pPr algn="ctr"/>
+            <a:r>
+              <a:rPr lang="en-US" dirty="0"/>
+              <a:t>NXP</a:t>
+            </a:r>
+          </a:p>
+        </p:txBody>
+      </p:sp>
+      <p:sp>
+        <p:nvSpPr>
+          <p:cNvPr id="11" name="Rectangle 10">
+            <a:extLst>
+              <a:ext uri="{FF2B5EF4-FFF2-40B4-BE49-F238E27FC236}">
+                <a16:creationId xmlns:a16="http://schemas.microsoft.com/office/drawing/2014/main" id="{B57CF8EB-ABA5-9087-E16F-E3CF1E0AA02E}"/>
+              </a:ext>
+            </a:extLst>
+          </p:cNvPr>
+          <p:cNvSpPr/>
+          <p:nvPr/>
+        </p:nvSpPr>
+        <p:spPr>
+          <a:xfrm>
+            <a:off x="776749" y="4380271"/>
+            <a:ext cx="2507226" cy="1258529"/>
+          </a:xfrm>
+          <a:prstGeom prst="rect">
+            <a:avLst/>
+          </a:prstGeom>
+        </p:spPr>
+        <p:style>
+          <a:lnRef idx="2">
+            <a:schemeClr val="accent3">
+              <a:shade val="15000"/>
+            </a:schemeClr>
+          </a:lnRef>
+          <a:fillRef idx="1">
+            <a:schemeClr val="accent3"/>
+          </a:fillRef>
+          <a:effectRef idx="0">
+            <a:schemeClr val="accent3"/>
+          </a:effectRef>
+          <a:fontRef idx="minor">
+            <a:schemeClr val="lt1"/>
+          </a:fontRef>
+        </p:style>
+        <p:txBody>
+          <a:bodyPr rtlCol="0" anchor="ctr"/>
+          <a:lstStyle/>
+          <a:p>
+            <a:pPr algn="ctr"/>
+            <a:r>
+              <a:rPr lang="en-US" dirty="0"/>
+              <a:t>Infineon</a:t>
+            </a:r>
+          </a:p>
+        </p:txBody>
+      </p:sp>
+      <p:sp>
+        <p:nvSpPr>
+          <p:cNvPr id="12" name="Rectangle 11">
+            <a:extLst>
+              <a:ext uri="{FF2B5EF4-FFF2-40B4-BE49-F238E27FC236}">
+                <a16:creationId xmlns:a16="http://schemas.microsoft.com/office/drawing/2014/main" id="{06B80FA8-2F1C-753E-1359-6970EA69FB0D}"/>
+              </a:ext>
+            </a:extLst>
+          </p:cNvPr>
+          <p:cNvSpPr/>
+          <p:nvPr/>
+        </p:nvSpPr>
+        <p:spPr>
+          <a:xfrm>
+            <a:off x="7821562" y="806243"/>
+            <a:ext cx="2507226" cy="1258529"/>
+          </a:xfrm>
+          <a:prstGeom prst="rect">
+            <a:avLst/>
+          </a:prstGeom>
+        </p:spPr>
+        <p:style>
+          <a:lnRef idx="2">
+            <a:schemeClr val="accent5">
+              <a:shade val="15000"/>
+            </a:schemeClr>
+          </a:lnRef>
+          <a:fillRef idx="1">
+            <a:schemeClr val="accent5"/>
+          </a:fillRef>
+          <a:effectRef idx="0">
+            <a:schemeClr val="accent5"/>
+          </a:effectRef>
+          <a:fontRef idx="minor">
+            <a:schemeClr val="lt1"/>
+          </a:fontRef>
+        </p:style>
+        <p:txBody>
+          <a:bodyPr rtlCol="0" anchor="ctr"/>
+          <a:lstStyle/>
+          <a:p>
+            <a:pPr algn="ctr"/>
+            <a:r>
+              <a:rPr lang="en-US" dirty="0"/>
+              <a:t>Renesas</a:t>
+            </a:r>
+          </a:p>
+        </p:txBody>
+      </p:sp>
+      <p:sp>
+        <p:nvSpPr>
+          <p:cNvPr id="16" name="Rectangle 15">
+            <a:extLst>
+              <a:ext uri="{FF2B5EF4-FFF2-40B4-BE49-F238E27FC236}">
+                <a16:creationId xmlns:a16="http://schemas.microsoft.com/office/drawing/2014/main" id="{C6261A88-3137-C9FC-4B17-634F80DA6066}"/>
+              </a:ext>
+            </a:extLst>
+          </p:cNvPr>
+          <p:cNvSpPr/>
+          <p:nvPr/>
+        </p:nvSpPr>
+        <p:spPr>
+          <a:xfrm>
+            <a:off x="7693743" y="2485102"/>
+            <a:ext cx="2507226" cy="1258529"/>
+          </a:xfrm>
+          <a:prstGeom prst="rect">
+            <a:avLst/>
+          </a:prstGeom>
+          <a:solidFill>
+            <a:schemeClr val="accent4">
+              <a:lumMod val="60000"/>
+              <a:lumOff val="40000"/>
+            </a:schemeClr>
+          </a:solidFill>
+        </p:spPr>
+        <p:style>
+          <a:lnRef idx="2">
+            <a:schemeClr val="accent5">
+              <a:shade val="15000"/>
+            </a:schemeClr>
+          </a:lnRef>
+          <a:fillRef idx="1">
+            <a:schemeClr val="accent5"/>
+          </a:fillRef>
+          <a:effectRef idx="0">
+            <a:schemeClr val="accent5"/>
+          </a:effectRef>
+          <a:fontRef idx="minor">
+            <a:schemeClr val="lt1"/>
+          </a:fontRef>
+        </p:style>
+        <p:txBody>
+          <a:bodyPr rtlCol="0" anchor="ctr"/>
+          <a:lstStyle/>
+          <a:p>
+            <a:pPr algn="ctr"/>
+            <a:r>
+              <a:rPr lang="en-US" dirty="0"/>
+              <a:t>TI</a:t>
+            </a:r>
+          </a:p>
+        </p:txBody>
+      </p:sp>
+      <p:sp>
+        <p:nvSpPr>
+          <p:cNvPr id="17" name="Rectangle 16">
+            <a:extLst>
+              <a:ext uri="{FF2B5EF4-FFF2-40B4-BE49-F238E27FC236}">
+                <a16:creationId xmlns:a16="http://schemas.microsoft.com/office/drawing/2014/main" id="{C3A876AC-448D-67F6-65E3-A7F2D9FF797E}"/>
+              </a:ext>
+            </a:extLst>
+          </p:cNvPr>
+          <p:cNvSpPr/>
+          <p:nvPr/>
+        </p:nvSpPr>
+        <p:spPr>
+          <a:xfrm>
+            <a:off x="7693743" y="4248763"/>
+            <a:ext cx="4178711" cy="1258529"/>
+          </a:xfrm>
+          <a:prstGeom prst="rect">
+            <a:avLst/>
+          </a:prstGeom>
+          <a:solidFill>
+            <a:schemeClr val="accent4">
+              <a:lumMod val="60000"/>
+              <a:lumOff val="40000"/>
+            </a:schemeClr>
+          </a:solidFill>
+        </p:spPr>
+        <p:style>
+          <a:lnRef idx="2">
+            <a:schemeClr val="accent5">
+              <a:shade val="15000"/>
+            </a:schemeClr>
+          </a:lnRef>
+          <a:fillRef idx="1">
+            <a:schemeClr val="accent5"/>
+          </a:fillRef>
+          <a:effectRef idx="0">
+            <a:schemeClr val="accent5"/>
+          </a:effectRef>
+          <a:fontRef idx="minor">
+            <a:schemeClr val="lt1"/>
+          </a:fontRef>
+        </p:style>
+        <p:txBody>
+          <a:bodyPr rtlCol="0" anchor="ctr"/>
+          <a:lstStyle/>
+          <a:p>
+            <a:pPr algn="ctr"/>
+            <a:r>
+              <a:rPr lang="en-US" dirty="0"/>
+              <a:t>Ras Pi</a:t>
+            </a:r>
+          </a:p>
+        </p:txBody>
+      </p:sp>
+      <p:sp>
+        <p:nvSpPr>
+          <p:cNvPr id="26" name="Rectangle 25">
+            <a:extLst>
+              <a:ext uri="{FF2B5EF4-FFF2-40B4-BE49-F238E27FC236}">
+                <a16:creationId xmlns:a16="http://schemas.microsoft.com/office/drawing/2014/main" id="{250A746A-BFD7-EDB6-AB63-A9F4FEC46F27}"/>
+              </a:ext>
+            </a:extLst>
+          </p:cNvPr>
+          <p:cNvSpPr/>
+          <p:nvPr/>
+        </p:nvSpPr>
+        <p:spPr>
+          <a:xfrm>
+            <a:off x="4842387" y="5422488"/>
+            <a:ext cx="2507226" cy="1258529"/>
+          </a:xfrm>
+          <a:prstGeom prst="rect">
+            <a:avLst/>
+          </a:prstGeom>
+          <a:solidFill>
+            <a:schemeClr val="accent4">
+              <a:lumMod val="60000"/>
+              <a:lumOff val="40000"/>
+            </a:schemeClr>
+          </a:solidFill>
+        </p:spPr>
+        <p:style>
+          <a:lnRef idx="2">
+            <a:schemeClr val="accent5">
+              <a:shade val="15000"/>
+            </a:schemeClr>
+          </a:lnRef>
+          <a:fillRef idx="1">
+            <a:schemeClr val="accent5"/>
+          </a:fillRef>
+          <a:effectRef idx="0">
+            <a:schemeClr val="accent5"/>
+          </a:effectRef>
+          <a:fontRef idx="minor">
+            <a:schemeClr val="lt1"/>
+          </a:fontRef>
+        </p:style>
+        <p:txBody>
+          <a:bodyPr rtlCol="0" anchor="ctr"/>
+          <a:lstStyle/>
+          <a:p>
+            <a:pPr algn="ctr"/>
+            <a:r>
+              <a:rPr lang="en-US" dirty="0"/>
+              <a:t>Open community</a:t>
+            </a:r>
+          </a:p>
+          <a:p>
+            <a:pPr algn="ctr"/>
+            <a:r>
+              <a:rPr lang="en-US" dirty="0"/>
+              <a:t>BBB</a:t>
+            </a:r>
+          </a:p>
+        </p:txBody>
+      </p:sp>
+      <p:sp>
+        <p:nvSpPr>
+          <p:cNvPr id="29" name="Rectangle 28">
+            <a:extLst>
+              <a:ext uri="{FF2B5EF4-FFF2-40B4-BE49-F238E27FC236}">
+                <a16:creationId xmlns:a16="http://schemas.microsoft.com/office/drawing/2014/main" id="{58EE3CE9-CB4B-A705-3982-691ADFE5B317}"/>
+              </a:ext>
+            </a:extLst>
+          </p:cNvPr>
+          <p:cNvSpPr/>
+          <p:nvPr/>
+        </p:nvSpPr>
+        <p:spPr>
+          <a:xfrm>
+            <a:off x="4964062" y="1495730"/>
+            <a:ext cx="2743202" cy="3054147"/>
+          </a:xfrm>
+          <a:prstGeom prst="rect">
+            <a:avLst/>
+          </a:prstGeom>
+        </p:spPr>
+        <p:style>
+          <a:lnRef idx="0">
+            <a:schemeClr val="accent6"/>
+          </a:lnRef>
+          <a:fillRef idx="3">
+            <a:schemeClr val="accent6"/>
+          </a:fillRef>
+          <a:effectRef idx="3">
+            <a:schemeClr val="accent6"/>
+          </a:effectRef>
+          <a:fontRef idx="minor">
+            <a:schemeClr val="lt1"/>
+          </a:fontRef>
+        </p:style>
+        <p:txBody>
+          <a:bodyPr rtlCol="0" anchor="ctr"/>
+          <a:lstStyle/>
+          <a:p>
+            <a:pPr algn="ctr"/>
+            <a:r>
+              <a:rPr lang="en-US" dirty="0"/>
+              <a:t>ARM</a:t>
+            </a:r>
+          </a:p>
+          <a:p>
+            <a:pPr marL="285750" indent="-285750" algn="ctr">
+              <a:buFont typeface="Wingdings" panose="05000000000000000000" pitchFamily="2" charset="2"/>
+              <a:buChar char="Ø"/>
+            </a:pPr>
+            <a:endParaRPr lang="en-US" dirty="0"/>
+          </a:p>
+          <a:p>
+            <a:pPr marL="285750" indent="-285750" algn="ctr">
+              <a:buFont typeface="Wingdings" panose="05000000000000000000" pitchFamily="2" charset="2"/>
+              <a:buChar char="Ø"/>
+            </a:pPr>
+            <a:r>
+              <a:rPr lang="en-US" dirty="0"/>
+              <a:t>90% CPU</a:t>
+            </a:r>
+          </a:p>
+          <a:p>
+            <a:pPr marL="285750" indent="-285750" algn="ctr">
+              <a:buFont typeface="Wingdings" panose="05000000000000000000" pitchFamily="2" charset="2"/>
+              <a:buChar char="Ø"/>
+            </a:pPr>
+            <a:r>
+              <a:rPr lang="en-US" dirty="0"/>
+              <a:t>A profile: application</a:t>
+            </a:r>
+          </a:p>
+          <a:p>
+            <a:pPr marL="285750" indent="-285750" algn="ctr">
+              <a:buFont typeface="Wingdings" panose="05000000000000000000" pitchFamily="2" charset="2"/>
+              <a:buChar char="Ø"/>
+            </a:pPr>
+            <a:r>
+              <a:rPr lang="en-US" dirty="0"/>
+              <a:t>R profile: real-time</a:t>
+            </a:r>
+          </a:p>
+          <a:p>
+            <a:pPr marL="285750" indent="-285750" algn="ctr">
+              <a:buFont typeface="Wingdings" panose="05000000000000000000" pitchFamily="2" charset="2"/>
+              <a:buChar char="Ø"/>
+            </a:pPr>
+            <a:r>
+              <a:rPr lang="en-US" dirty="0"/>
+              <a:t>M profile: micro controller</a:t>
+            </a:r>
+          </a:p>
+          <a:p>
+            <a:pPr algn="ctr"/>
+            <a:endParaRPr lang="en-US" dirty="0"/>
+          </a:p>
+          <a:p>
+            <a:pPr marL="285750" indent="-285750" algn="ctr">
+              <a:buFont typeface="Wingdings" panose="05000000000000000000" pitchFamily="2" charset="2"/>
+              <a:buChar char="Ø"/>
+            </a:pPr>
+            <a:endParaRPr lang="en-US" dirty="0"/>
+          </a:p>
+        </p:txBody>
+      </p:sp>
+      <p:sp>
+        <p:nvSpPr>
+          <p:cNvPr id="32" name="Rectangle 31">
+            <a:extLst>
+              <a:ext uri="{FF2B5EF4-FFF2-40B4-BE49-F238E27FC236}">
+                <a16:creationId xmlns:a16="http://schemas.microsoft.com/office/drawing/2014/main" id="{8A9205AA-F477-D172-10D4-50234E2AB53A}"/>
+              </a:ext>
+            </a:extLst>
+          </p:cNvPr>
+          <p:cNvSpPr/>
+          <p:nvPr/>
+        </p:nvSpPr>
+        <p:spPr>
+          <a:xfrm>
+            <a:off x="1519085" y="926687"/>
+            <a:ext cx="1764890" cy="1096297"/>
+          </a:xfrm>
+          <a:prstGeom prst="rect">
+            <a:avLst/>
+          </a:prstGeom>
+        </p:spPr>
+        <p:style>
+          <a:lnRef idx="0">
+            <a:schemeClr val="accent6"/>
+          </a:lnRef>
+          <a:fillRef idx="3">
+            <a:schemeClr val="accent6"/>
+          </a:fillRef>
+          <a:effectRef idx="3">
+            <a:schemeClr val="accent6"/>
+          </a:effectRef>
+          <a:fontRef idx="minor">
+            <a:schemeClr val="lt1"/>
+          </a:fontRef>
+        </p:style>
+        <p:txBody>
+          <a:bodyPr rtlCol="0" anchor="ctr"/>
+          <a:lstStyle/>
+          <a:p>
+            <a:pPr algn="ctr"/>
+            <a:r>
+              <a:rPr lang="en-US" dirty="0"/>
+              <a:t>ARM</a:t>
+            </a:r>
+          </a:p>
+          <a:p>
+            <a:pPr marL="285750" indent="-285750" algn="ctr">
+              <a:buFont typeface="Wingdings" panose="05000000000000000000" pitchFamily="2" charset="2"/>
+              <a:buChar char="Ø"/>
+            </a:pPr>
+            <a:r>
+              <a:rPr lang="en-US" dirty="0"/>
+              <a:t>90% CPU</a:t>
+            </a:r>
+          </a:p>
+          <a:p>
+            <a:pPr marL="285750" indent="-285750" algn="ctr">
+              <a:buFont typeface="Wingdings" panose="05000000000000000000" pitchFamily="2" charset="2"/>
+              <a:buChar char="Ø"/>
+            </a:pPr>
+            <a:endParaRPr lang="en-US" dirty="0"/>
+          </a:p>
+        </p:txBody>
+      </p:sp>
+      <p:sp>
+        <p:nvSpPr>
+          <p:cNvPr id="34" name="Rectangle 33">
+            <a:extLst>
+              <a:ext uri="{FF2B5EF4-FFF2-40B4-BE49-F238E27FC236}">
+                <a16:creationId xmlns:a16="http://schemas.microsoft.com/office/drawing/2014/main" id="{26F56DF2-4227-E901-FE2C-AC5A147D017E}"/>
+              </a:ext>
+            </a:extLst>
+          </p:cNvPr>
+          <p:cNvSpPr/>
+          <p:nvPr/>
+        </p:nvSpPr>
+        <p:spPr>
+          <a:xfrm>
+            <a:off x="1209368" y="2808337"/>
+            <a:ext cx="1582993" cy="1088923"/>
+          </a:xfrm>
+          <a:prstGeom prst="rect">
+            <a:avLst/>
+          </a:prstGeom>
+        </p:spPr>
+        <p:style>
+          <a:lnRef idx="0">
+            <a:schemeClr val="accent6"/>
+          </a:lnRef>
+          <a:fillRef idx="3">
+            <a:schemeClr val="accent6"/>
+          </a:fillRef>
+          <a:effectRef idx="3">
+            <a:schemeClr val="accent6"/>
+          </a:effectRef>
+          <a:fontRef idx="minor">
+            <a:schemeClr val="lt1"/>
+          </a:fontRef>
+        </p:style>
+        <p:txBody>
+          <a:bodyPr rtlCol="0" anchor="ctr"/>
+          <a:lstStyle/>
+          <a:p>
+            <a:pPr algn="ctr"/>
+            <a:r>
+              <a:rPr lang="en-US" dirty="0"/>
+              <a:t>ARM</a:t>
+            </a:r>
+          </a:p>
+          <a:p>
+            <a:pPr marL="285750" indent="-285750" algn="ctr">
+              <a:buFont typeface="Wingdings" panose="05000000000000000000" pitchFamily="2" charset="2"/>
+              <a:buChar char="Ø"/>
+            </a:pPr>
+            <a:r>
+              <a:rPr lang="en-US" dirty="0"/>
+              <a:t>90% CPU</a:t>
+            </a:r>
+          </a:p>
+          <a:p>
+            <a:pPr marL="285750" indent="-285750" algn="ctr">
+              <a:buFont typeface="Wingdings" panose="05000000000000000000" pitchFamily="2" charset="2"/>
+              <a:buChar char="Ø"/>
+            </a:pPr>
+            <a:endParaRPr lang="en-US" dirty="0"/>
+          </a:p>
+        </p:txBody>
+      </p:sp>
+      <p:sp>
+        <p:nvSpPr>
+          <p:cNvPr id="46" name="Rectangle 45">
+            <a:extLst>
+              <a:ext uri="{FF2B5EF4-FFF2-40B4-BE49-F238E27FC236}">
+                <a16:creationId xmlns:a16="http://schemas.microsoft.com/office/drawing/2014/main" id="{873D0457-3447-B4F3-02A0-2BB35FA2A7BC}"/>
+              </a:ext>
+            </a:extLst>
+          </p:cNvPr>
+          <p:cNvSpPr/>
+          <p:nvPr/>
+        </p:nvSpPr>
+        <p:spPr>
+          <a:xfrm>
+            <a:off x="1111044" y="4549877"/>
+            <a:ext cx="1582993" cy="1088923"/>
+          </a:xfrm>
+          <a:prstGeom prst="rect">
+            <a:avLst/>
+          </a:prstGeom>
+        </p:spPr>
+        <p:style>
+          <a:lnRef idx="0">
+            <a:schemeClr val="accent6"/>
+          </a:lnRef>
+          <a:fillRef idx="3">
+            <a:schemeClr val="accent6"/>
+          </a:fillRef>
+          <a:effectRef idx="3">
+            <a:schemeClr val="accent6"/>
+          </a:effectRef>
+          <a:fontRef idx="minor">
+            <a:schemeClr val="lt1"/>
+          </a:fontRef>
+        </p:style>
+        <p:txBody>
+          <a:bodyPr rtlCol="0" anchor="ctr"/>
+          <a:lstStyle/>
+          <a:p>
+            <a:pPr algn="ctr"/>
+            <a:r>
+              <a:rPr lang="en-US" dirty="0"/>
+              <a:t>ARM</a:t>
+            </a:r>
+          </a:p>
+          <a:p>
+            <a:pPr marL="285750" indent="-285750" algn="ctr">
+              <a:buFont typeface="Wingdings" panose="05000000000000000000" pitchFamily="2" charset="2"/>
+              <a:buChar char="Ø"/>
+            </a:pPr>
+            <a:r>
+              <a:rPr lang="en-US" dirty="0"/>
+              <a:t>90% CPU</a:t>
+            </a:r>
+          </a:p>
+          <a:p>
+            <a:pPr marL="285750" indent="-285750" algn="ctr">
+              <a:buFont typeface="Wingdings" panose="05000000000000000000" pitchFamily="2" charset="2"/>
+              <a:buChar char="Ø"/>
+            </a:pPr>
+            <a:endParaRPr lang="en-US" dirty="0"/>
+          </a:p>
+        </p:txBody>
+      </p:sp>
+      <p:sp>
+        <p:nvSpPr>
+          <p:cNvPr id="49" name="Rectangle 48">
+            <a:extLst>
+              <a:ext uri="{FF2B5EF4-FFF2-40B4-BE49-F238E27FC236}">
+                <a16:creationId xmlns:a16="http://schemas.microsoft.com/office/drawing/2014/main" id="{6EF65821-2BB4-56C0-3399-7C442BDF41B3}"/>
+              </a:ext>
+            </a:extLst>
+          </p:cNvPr>
+          <p:cNvSpPr/>
+          <p:nvPr/>
+        </p:nvSpPr>
+        <p:spPr>
+          <a:xfrm>
+            <a:off x="7949382" y="1064339"/>
+            <a:ext cx="1582993" cy="1088923"/>
+          </a:xfrm>
+          <a:prstGeom prst="rect">
+            <a:avLst/>
+          </a:prstGeom>
+        </p:spPr>
+        <p:style>
+          <a:lnRef idx="0">
+            <a:schemeClr val="accent6"/>
+          </a:lnRef>
+          <a:fillRef idx="3">
+            <a:schemeClr val="accent6"/>
+          </a:fillRef>
+          <a:effectRef idx="3">
+            <a:schemeClr val="accent6"/>
+          </a:effectRef>
+          <a:fontRef idx="minor">
+            <a:schemeClr val="lt1"/>
+          </a:fontRef>
+        </p:style>
+        <p:txBody>
+          <a:bodyPr rtlCol="0" anchor="ctr"/>
+          <a:lstStyle/>
+          <a:p>
+            <a:pPr algn="ctr"/>
+            <a:r>
+              <a:rPr lang="en-US" dirty="0"/>
+              <a:t>ARM</a:t>
+            </a:r>
+          </a:p>
+          <a:p>
+            <a:pPr marL="285750" indent="-285750" algn="ctr">
+              <a:buFont typeface="Wingdings" panose="05000000000000000000" pitchFamily="2" charset="2"/>
+              <a:buChar char="Ø"/>
+            </a:pPr>
+            <a:r>
+              <a:rPr lang="en-US" dirty="0"/>
+              <a:t>90% CPU</a:t>
+            </a:r>
+          </a:p>
+          <a:p>
+            <a:pPr marL="285750" indent="-285750" algn="ctr">
+              <a:buFont typeface="Wingdings" panose="05000000000000000000" pitchFamily="2" charset="2"/>
+              <a:buChar char="Ø"/>
+            </a:pPr>
+            <a:endParaRPr lang="en-US" dirty="0"/>
+          </a:p>
+        </p:txBody>
+      </p:sp>
+      <p:sp>
+        <p:nvSpPr>
+          <p:cNvPr id="53" name="Rectangle 52">
+            <a:extLst>
+              <a:ext uri="{FF2B5EF4-FFF2-40B4-BE49-F238E27FC236}">
+                <a16:creationId xmlns:a16="http://schemas.microsoft.com/office/drawing/2014/main" id="{45166B10-C97C-670F-AD81-35F3429FE1C6}"/>
+              </a:ext>
+            </a:extLst>
+          </p:cNvPr>
+          <p:cNvSpPr/>
+          <p:nvPr/>
+        </p:nvSpPr>
+        <p:spPr>
+          <a:xfrm>
+            <a:off x="8499989" y="2679289"/>
+            <a:ext cx="1582993" cy="1088923"/>
+          </a:xfrm>
+          <a:prstGeom prst="rect">
+            <a:avLst/>
+          </a:prstGeom>
+        </p:spPr>
+        <p:style>
+          <a:lnRef idx="0">
+            <a:schemeClr val="accent6"/>
+          </a:lnRef>
+          <a:fillRef idx="3">
+            <a:schemeClr val="accent6"/>
+          </a:fillRef>
+          <a:effectRef idx="3">
+            <a:schemeClr val="accent6"/>
+          </a:effectRef>
+          <a:fontRef idx="minor">
+            <a:schemeClr val="lt1"/>
+          </a:fontRef>
+        </p:style>
+        <p:txBody>
+          <a:bodyPr rtlCol="0" anchor="ctr"/>
+          <a:lstStyle/>
+          <a:p>
+            <a:pPr algn="ctr"/>
+            <a:r>
+              <a:rPr lang="en-US" dirty="0"/>
+              <a:t>ARM</a:t>
+            </a:r>
+          </a:p>
+          <a:p>
+            <a:pPr marL="285750" indent="-285750" algn="ctr">
+              <a:buFont typeface="Wingdings" panose="05000000000000000000" pitchFamily="2" charset="2"/>
+              <a:buChar char="Ø"/>
+            </a:pPr>
+            <a:r>
+              <a:rPr lang="en-US" dirty="0"/>
+              <a:t>90% CPU</a:t>
+            </a:r>
+          </a:p>
+          <a:p>
+            <a:pPr marL="285750" indent="-285750" algn="ctr">
+              <a:buFont typeface="Wingdings" panose="05000000000000000000" pitchFamily="2" charset="2"/>
+              <a:buChar char="Ø"/>
+            </a:pPr>
+            <a:endParaRPr lang="en-US" dirty="0"/>
+          </a:p>
+        </p:txBody>
+      </p:sp>
+      <p:sp>
+        <p:nvSpPr>
+          <p:cNvPr id="54" name="Rectangle 53">
+            <a:extLst>
+              <a:ext uri="{FF2B5EF4-FFF2-40B4-BE49-F238E27FC236}">
+                <a16:creationId xmlns:a16="http://schemas.microsoft.com/office/drawing/2014/main" id="{3350105A-E148-D149-EED3-AEB951D2BD98}"/>
+              </a:ext>
+            </a:extLst>
+          </p:cNvPr>
+          <p:cNvSpPr/>
+          <p:nvPr/>
+        </p:nvSpPr>
+        <p:spPr>
+          <a:xfrm>
+            <a:off x="9409472" y="4163961"/>
+            <a:ext cx="1582993" cy="1088923"/>
+          </a:xfrm>
+          <a:prstGeom prst="rect">
+            <a:avLst/>
+          </a:prstGeom>
+        </p:spPr>
+        <p:style>
+          <a:lnRef idx="0">
+            <a:schemeClr val="accent6"/>
+          </a:lnRef>
+          <a:fillRef idx="3">
+            <a:schemeClr val="accent6"/>
+          </a:fillRef>
+          <a:effectRef idx="3">
+            <a:schemeClr val="accent6"/>
+          </a:effectRef>
+          <a:fontRef idx="minor">
+            <a:schemeClr val="lt1"/>
+          </a:fontRef>
+        </p:style>
+        <p:txBody>
+          <a:bodyPr rtlCol="0" anchor="ctr"/>
+          <a:lstStyle/>
+          <a:p>
+            <a:pPr algn="ctr"/>
+            <a:r>
+              <a:rPr lang="en-US" dirty="0"/>
+              <a:t>ARM</a:t>
+            </a:r>
+          </a:p>
+          <a:p>
+            <a:pPr marL="285750" indent="-285750" algn="ctr">
+              <a:buFont typeface="Wingdings" panose="05000000000000000000" pitchFamily="2" charset="2"/>
+              <a:buChar char="Ø"/>
+            </a:pPr>
+            <a:r>
+              <a:rPr lang="en-US" dirty="0"/>
+              <a:t>90% CPU</a:t>
+            </a:r>
+          </a:p>
+          <a:p>
+            <a:pPr marL="285750" indent="-285750" algn="ctr">
+              <a:buFont typeface="Wingdings" panose="05000000000000000000" pitchFamily="2" charset="2"/>
+              <a:buChar char="Ø"/>
+            </a:pPr>
+            <a:endParaRPr lang="en-US" dirty="0"/>
+          </a:p>
+        </p:txBody>
+      </p:sp>
+      <p:sp>
+        <p:nvSpPr>
+          <p:cNvPr id="55" name="Rectangle 54">
+            <a:extLst>
+              <a:ext uri="{FF2B5EF4-FFF2-40B4-BE49-F238E27FC236}">
+                <a16:creationId xmlns:a16="http://schemas.microsoft.com/office/drawing/2014/main" id="{A2E50C35-0255-45E3-1C00-51FD83DE3796}"/>
+              </a:ext>
+            </a:extLst>
+          </p:cNvPr>
+          <p:cNvSpPr/>
+          <p:nvPr/>
+        </p:nvSpPr>
+        <p:spPr>
+          <a:xfrm>
+            <a:off x="4930878" y="5507292"/>
+            <a:ext cx="1582993" cy="1088923"/>
+          </a:xfrm>
+          <a:prstGeom prst="rect">
+            <a:avLst/>
+          </a:prstGeom>
+        </p:spPr>
+        <p:style>
+          <a:lnRef idx="0">
+            <a:schemeClr val="accent6"/>
+          </a:lnRef>
+          <a:fillRef idx="3">
+            <a:schemeClr val="accent6"/>
+          </a:fillRef>
+          <a:effectRef idx="3">
+            <a:schemeClr val="accent6"/>
+          </a:effectRef>
+          <a:fontRef idx="minor">
+            <a:schemeClr val="lt1"/>
+          </a:fontRef>
+        </p:style>
+        <p:txBody>
+          <a:bodyPr rtlCol="0" anchor="ctr"/>
+          <a:lstStyle/>
+          <a:p>
+            <a:pPr algn="ctr"/>
+            <a:r>
+              <a:rPr lang="en-US" dirty="0"/>
+              <a:t>ARM</a:t>
+            </a:r>
+          </a:p>
+          <a:p>
+            <a:pPr marL="285750" indent="-285750" algn="ctr">
+              <a:buFont typeface="Wingdings" panose="05000000000000000000" pitchFamily="2" charset="2"/>
+              <a:buChar char="Ø"/>
+            </a:pPr>
+            <a:r>
+              <a:rPr lang="en-US" dirty="0"/>
+              <a:t>90% CPU</a:t>
+            </a:r>
+          </a:p>
+          <a:p>
+            <a:pPr marL="285750" indent="-285750" algn="ctr">
+              <a:buFont typeface="Wingdings" panose="05000000000000000000" pitchFamily="2" charset="2"/>
+              <a:buChar char="Ø"/>
+            </a:pPr>
+            <a:endParaRPr lang="en-US" dirty="0"/>
+          </a:p>
+        </p:txBody>
+      </p:sp>
+      <p:sp>
+        <p:nvSpPr>
+          <p:cNvPr id="56" name="Rectangle 55">
+            <a:extLst>
+              <a:ext uri="{FF2B5EF4-FFF2-40B4-BE49-F238E27FC236}">
+                <a16:creationId xmlns:a16="http://schemas.microsoft.com/office/drawing/2014/main" id="{D0531EE6-538E-2C98-6765-DD960D976B3A}"/>
+              </a:ext>
+            </a:extLst>
+          </p:cNvPr>
+          <p:cNvSpPr/>
+          <p:nvPr/>
+        </p:nvSpPr>
+        <p:spPr>
+          <a:xfrm>
+            <a:off x="3687097" y="926687"/>
+            <a:ext cx="941439" cy="469494"/>
+          </a:xfrm>
+          <a:prstGeom prst="rect">
+            <a:avLst/>
+          </a:prstGeom>
+        </p:spPr>
+        <p:style>
+          <a:lnRef idx="2">
+            <a:schemeClr val="accent2">
+              <a:shade val="15000"/>
+            </a:schemeClr>
+          </a:lnRef>
+          <a:fillRef idx="1">
+            <a:schemeClr val="accent2"/>
+          </a:fillRef>
+          <a:effectRef idx="0">
+            <a:schemeClr val="accent2"/>
+          </a:effectRef>
+          <a:fontRef idx="minor">
+            <a:schemeClr val="lt1"/>
+          </a:fontRef>
+        </p:style>
+        <p:txBody>
+          <a:bodyPr rtlCol="0" anchor="ctr"/>
+          <a:lstStyle/>
+          <a:p>
+            <a:pPr algn="ctr"/>
+            <a:r>
+              <a:rPr lang="en-US" dirty="0"/>
+              <a:t>I/O1 (ST)</a:t>
+            </a:r>
+          </a:p>
+        </p:txBody>
+      </p:sp>
+      <p:sp>
+        <p:nvSpPr>
+          <p:cNvPr id="57" name="Rectangle 56">
+            <a:extLst>
+              <a:ext uri="{FF2B5EF4-FFF2-40B4-BE49-F238E27FC236}">
+                <a16:creationId xmlns:a16="http://schemas.microsoft.com/office/drawing/2014/main" id="{0B33C5CE-BADC-F1A6-3C4B-2E2D68D3EF48}"/>
+              </a:ext>
+            </a:extLst>
+          </p:cNvPr>
+          <p:cNvSpPr/>
+          <p:nvPr/>
+        </p:nvSpPr>
+        <p:spPr>
+          <a:xfrm>
+            <a:off x="3650226" y="1495730"/>
+            <a:ext cx="941439" cy="469494"/>
+          </a:xfrm>
+          <a:prstGeom prst="rect">
+            <a:avLst/>
+          </a:prstGeom>
+        </p:spPr>
+        <p:style>
+          <a:lnRef idx="2">
+            <a:schemeClr val="accent2">
+              <a:shade val="15000"/>
+            </a:schemeClr>
+          </a:lnRef>
+          <a:fillRef idx="1">
+            <a:schemeClr val="accent2"/>
+          </a:fillRef>
+          <a:effectRef idx="0">
+            <a:schemeClr val="accent2"/>
+          </a:effectRef>
+          <a:fontRef idx="minor">
+            <a:schemeClr val="lt1"/>
+          </a:fontRef>
+        </p:style>
+        <p:txBody>
+          <a:bodyPr rtlCol="0" anchor="ctr"/>
+          <a:lstStyle/>
+          <a:p>
+            <a:pPr algn="ctr"/>
+            <a:r>
+              <a:rPr lang="en-US" dirty="0"/>
+              <a:t>I/O2 (ST)</a:t>
+            </a:r>
+          </a:p>
+        </p:txBody>
+      </p:sp>
+      <p:sp>
+        <p:nvSpPr>
+          <p:cNvPr id="58" name="Rectangle 57">
+            <a:extLst>
+              <a:ext uri="{FF2B5EF4-FFF2-40B4-BE49-F238E27FC236}">
+                <a16:creationId xmlns:a16="http://schemas.microsoft.com/office/drawing/2014/main" id="{97B14286-151D-CCF6-0239-3DF1467DB6C8}"/>
+              </a:ext>
+            </a:extLst>
+          </p:cNvPr>
+          <p:cNvSpPr/>
+          <p:nvPr/>
+        </p:nvSpPr>
+        <p:spPr>
+          <a:xfrm>
+            <a:off x="3038166" y="2679289"/>
+            <a:ext cx="1170041" cy="368711"/>
+          </a:xfrm>
+          <a:prstGeom prst="rect">
+            <a:avLst/>
+          </a:prstGeom>
+        </p:spPr>
+        <p:style>
+          <a:lnRef idx="2">
+            <a:schemeClr val="accent1">
+              <a:shade val="15000"/>
+            </a:schemeClr>
+          </a:lnRef>
+          <a:fillRef idx="1">
+            <a:schemeClr val="accent1"/>
+          </a:fillRef>
+          <a:effectRef idx="0">
+            <a:schemeClr val="accent1"/>
+          </a:effectRef>
+          <a:fontRef idx="minor">
+            <a:schemeClr val="lt1"/>
+          </a:fontRef>
+        </p:style>
+        <p:txBody>
+          <a:bodyPr rtlCol="0" anchor="ctr"/>
+          <a:lstStyle/>
+          <a:p>
+            <a:pPr algn="ctr"/>
+            <a:r>
+              <a:rPr lang="en-US" dirty="0"/>
+              <a:t>NXP I/O</a:t>
+            </a:r>
+          </a:p>
+        </p:txBody>
+      </p:sp>
+      <p:sp>
+        <p:nvSpPr>
+          <p:cNvPr id="59" name="Rectangle 58">
+            <a:extLst>
+              <a:ext uri="{FF2B5EF4-FFF2-40B4-BE49-F238E27FC236}">
+                <a16:creationId xmlns:a16="http://schemas.microsoft.com/office/drawing/2014/main" id="{6595224B-E084-8338-C50D-9FDCA033C6FA}"/>
+              </a:ext>
+            </a:extLst>
+          </p:cNvPr>
+          <p:cNvSpPr/>
+          <p:nvPr/>
+        </p:nvSpPr>
+        <p:spPr>
+          <a:xfrm>
+            <a:off x="2987775" y="3151235"/>
+            <a:ext cx="1170041" cy="368711"/>
+          </a:xfrm>
+          <a:prstGeom prst="rect">
+            <a:avLst/>
+          </a:prstGeom>
+        </p:spPr>
+        <p:style>
+          <a:lnRef idx="2">
+            <a:schemeClr val="accent1">
+              <a:shade val="15000"/>
+            </a:schemeClr>
+          </a:lnRef>
+          <a:fillRef idx="1">
+            <a:schemeClr val="accent1"/>
+          </a:fillRef>
+          <a:effectRef idx="0">
+            <a:schemeClr val="accent1"/>
+          </a:effectRef>
+          <a:fontRef idx="minor">
+            <a:schemeClr val="lt1"/>
+          </a:fontRef>
+        </p:style>
+        <p:txBody>
+          <a:bodyPr rtlCol="0" anchor="ctr"/>
+          <a:lstStyle/>
+          <a:p>
+            <a:pPr algn="ctr"/>
+            <a:r>
+              <a:rPr lang="en-US" dirty="0"/>
+              <a:t>NXP I/O</a:t>
+            </a:r>
+          </a:p>
+        </p:txBody>
+      </p:sp>
+      <p:sp>
+        <p:nvSpPr>
+          <p:cNvPr id="60" name="TextBox 59">
+            <a:extLst>
+              <a:ext uri="{FF2B5EF4-FFF2-40B4-BE49-F238E27FC236}">
+                <a16:creationId xmlns:a16="http://schemas.microsoft.com/office/drawing/2014/main" id="{32A69ABF-B77A-120E-44A6-0FB7ABDB177B}"/>
+              </a:ext>
+            </a:extLst>
+          </p:cNvPr>
+          <p:cNvSpPr txBox="1"/>
+          <p:nvPr/>
+        </p:nvSpPr>
+        <p:spPr>
+          <a:xfrm>
+            <a:off x="943896" y="5919019"/>
+            <a:ext cx="2507226" cy="923330"/>
+          </a:xfrm>
+          <a:prstGeom prst="rect">
+            <a:avLst/>
+          </a:prstGeom>
+          <a:noFill/>
+        </p:spPr>
+        <p:txBody>
+          <a:bodyPr wrap="square" rtlCol="0">
+            <a:spAutoFit/>
+          </a:bodyPr>
+          <a:lstStyle/>
+          <a:p>
+            <a:r>
+              <a:rPr lang="en-US" dirty="0"/>
+              <a:t>Job -&gt; CPU</a:t>
+            </a:r>
+          </a:p>
+          <a:p>
+            <a:r>
+              <a:rPr lang="en-US" dirty="0"/>
+              <a:t>0.5s</a:t>
+            </a:r>
+          </a:p>
+          <a:p>
+            <a:r>
+              <a:rPr lang="en-US" dirty="0"/>
+              <a:t>0.05s</a:t>
+            </a:r>
+          </a:p>
+        </p:txBody>
+      </p:sp>
+      <p:sp>
+        <p:nvSpPr>
+          <p:cNvPr id="63" name="Rectangle 62">
+            <a:extLst>
+              <a:ext uri="{FF2B5EF4-FFF2-40B4-BE49-F238E27FC236}">
+                <a16:creationId xmlns:a16="http://schemas.microsoft.com/office/drawing/2014/main" id="{0842AD61-FFFE-F82A-7390-DF2FED9B3BDD}"/>
+              </a:ext>
+            </a:extLst>
+          </p:cNvPr>
+          <p:cNvSpPr/>
+          <p:nvPr/>
+        </p:nvSpPr>
+        <p:spPr>
+          <a:xfrm>
+            <a:off x="7998543" y="5868628"/>
+            <a:ext cx="2585884" cy="727587"/>
+          </a:xfrm>
+          <a:prstGeom prst="rect">
+            <a:avLst/>
+          </a:prstGeom>
+        </p:spPr>
+        <p:style>
+          <a:lnRef idx="2">
+            <a:schemeClr val="accent1">
+              <a:shade val="15000"/>
+            </a:schemeClr>
+          </a:lnRef>
+          <a:fillRef idx="1">
+            <a:schemeClr val="accent1"/>
+          </a:fillRef>
+          <a:effectRef idx="0">
+            <a:schemeClr val="accent1"/>
+          </a:effectRef>
+          <a:fontRef idx="minor">
+            <a:schemeClr val="lt1"/>
+          </a:fontRef>
+        </p:style>
+        <p:txBody>
+          <a:bodyPr rtlCol="0" anchor="ctr"/>
+          <a:lstStyle/>
+          <a:p>
+            <a:pPr algn="ctr"/>
+            <a:r>
+              <a:rPr lang="en-US" dirty="0"/>
+              <a:t>ESP32 </a:t>
+            </a:r>
+          </a:p>
+        </p:txBody>
+      </p:sp>
+    </p:spTree>
+    <p:extLst>
+      <p:ext uri="{BB962C8B-B14F-4D97-AF65-F5344CB8AC3E}">
+        <p14:creationId xmlns:p14="http://schemas.microsoft.com/office/powerpoint/2010/main" val="126235141"/>
+      </p:ext>
+    </p:extLst>
+  </p:cSld>
+  <p:clrMapOvr>
+    <a:masterClrMapping/>
+  </p:clrMapOvr>
+</p:sld>
+</file>
+
+<file path=ppt/slides/slide5.xml><?xml version="1.0" encoding="utf-8"?>
+<p:sld xmlns:a="http://schemas.openxmlformats.org/drawingml/2006/main" xmlns:r="http://schemas.openxmlformats.org/officeDocument/2006/relationships" xmlns:p="http://schemas.openxmlformats.org/presentationml/2006/main">
+  <p:cSld>
+    <p:spTree>
+      <p:nvGrpSpPr>
+        <p:cNvPr id="1" name="">
+          <a:extLst>
+            <a:ext uri="{FF2B5EF4-FFF2-40B4-BE49-F238E27FC236}">
+              <a16:creationId xmlns:a16="http://schemas.microsoft.com/office/drawing/2014/main" id="{D4F4F916-83BB-24F4-1EB5-434E26E2DC2B}"/>
+            </a:ext>
+          </a:extLst>
+        </p:cNvPr>
+        <p:cNvGrpSpPr/>
+        <p:nvPr/>
+      </p:nvGrpSpPr>
+      <p:grpSpPr>
+        <a:xfrm>
+          <a:off x="0" y="0"/>
+          <a:ext cx="0" cy="0"/>
+          <a:chOff x="0" y="0"/>
+          <a:chExt cx="0" cy="0"/>
+        </a:xfrm>
+      </p:grpSpPr>
+      <p:sp>
+        <p:nvSpPr>
+          <p:cNvPr id="59" name="Rectangle 58">
+            <a:extLst>
+              <a:ext uri="{FF2B5EF4-FFF2-40B4-BE49-F238E27FC236}">
+                <a16:creationId xmlns:a16="http://schemas.microsoft.com/office/drawing/2014/main" id="{A42CC06D-9A14-DF7A-05CD-979C108C6D36}"/>
+              </a:ext>
+            </a:extLst>
+          </p:cNvPr>
+          <p:cNvSpPr/>
+          <p:nvPr/>
+        </p:nvSpPr>
+        <p:spPr>
+          <a:xfrm>
+            <a:off x="3322078" y="2344996"/>
+            <a:ext cx="1054197" cy="402820"/>
+          </a:xfrm>
+          <a:prstGeom prst="rect">
+            <a:avLst/>
+          </a:prstGeom>
+        </p:spPr>
+        <p:style>
+          <a:lnRef idx="2">
+            <a:schemeClr val="accent1">
+              <a:shade val="15000"/>
+            </a:schemeClr>
+          </a:lnRef>
+          <a:fillRef idx="1">
+            <a:schemeClr val="accent1"/>
+          </a:fillRef>
+          <a:effectRef idx="0">
+            <a:schemeClr val="accent1"/>
+          </a:effectRef>
+          <a:fontRef idx="minor">
+            <a:schemeClr val="lt1"/>
+          </a:fontRef>
+        </p:style>
+        <p:txBody>
+          <a:bodyPr rtlCol="0" anchor="ctr"/>
+          <a:lstStyle/>
+          <a:p>
+            <a:pPr algn="ctr"/>
+            <a:r>
+              <a:rPr lang="en-US" dirty="0"/>
+              <a:t>L2</a:t>
+            </a:r>
+          </a:p>
+          <a:p>
+            <a:pPr algn="ctr"/>
+            <a:endParaRPr lang="en-US" dirty="0"/>
+          </a:p>
+        </p:txBody>
+      </p:sp>
+      <p:sp>
+        <p:nvSpPr>
+          <p:cNvPr id="2" name="Rectangle 1">
+            <a:extLst>
+              <a:ext uri="{FF2B5EF4-FFF2-40B4-BE49-F238E27FC236}">
+                <a16:creationId xmlns:a16="http://schemas.microsoft.com/office/drawing/2014/main" id="{E5948B60-A0CE-9733-A69B-D531B79F99DA}"/>
+              </a:ext>
+            </a:extLst>
+          </p:cNvPr>
+          <p:cNvSpPr/>
+          <p:nvPr/>
+        </p:nvSpPr>
+        <p:spPr>
+          <a:xfrm>
+            <a:off x="1524000" y="2107749"/>
+            <a:ext cx="1759974" cy="1887791"/>
+          </a:xfrm>
+          <a:prstGeom prst="rect">
+            <a:avLst/>
+          </a:prstGeom>
+        </p:spPr>
+        <p:style>
+          <a:lnRef idx="1">
+            <a:schemeClr val="accent2"/>
+          </a:lnRef>
+          <a:fillRef idx="3">
+            <a:schemeClr val="accent2"/>
+          </a:fillRef>
+          <a:effectRef idx="2">
+            <a:schemeClr val="accent2"/>
+          </a:effectRef>
+          <a:fontRef idx="minor">
+            <a:schemeClr val="lt1"/>
+          </a:fontRef>
+        </p:style>
+        <p:txBody>
+          <a:bodyPr rtlCol="0" anchor="ctr"/>
+          <a:lstStyle/>
+          <a:p>
+            <a:pPr algn="ctr"/>
+            <a:r>
+              <a:rPr lang="en-US" dirty="0"/>
+              <a:t>CPU</a:t>
+            </a:r>
+          </a:p>
+        </p:txBody>
+      </p:sp>
+      <p:sp>
+        <p:nvSpPr>
+          <p:cNvPr id="3" name="Rectangle 2">
+            <a:extLst>
+              <a:ext uri="{FF2B5EF4-FFF2-40B4-BE49-F238E27FC236}">
+                <a16:creationId xmlns:a16="http://schemas.microsoft.com/office/drawing/2014/main" id="{7125813B-ABD8-D0A4-889E-0E10F83AB9F0}"/>
+              </a:ext>
+            </a:extLst>
+          </p:cNvPr>
+          <p:cNvSpPr/>
+          <p:nvPr/>
+        </p:nvSpPr>
+        <p:spPr>
+          <a:xfrm>
+            <a:off x="4640826" y="68827"/>
+            <a:ext cx="5759864" cy="2236124"/>
+          </a:xfrm>
+          <a:prstGeom prst="rect">
+            <a:avLst/>
+          </a:prstGeom>
+        </p:spPr>
+        <p:style>
+          <a:lnRef idx="1">
+            <a:schemeClr val="accent4"/>
+          </a:lnRef>
+          <a:fillRef idx="3">
+            <a:schemeClr val="accent4"/>
+          </a:fillRef>
+          <a:effectRef idx="2">
+            <a:schemeClr val="accent4"/>
+          </a:effectRef>
+          <a:fontRef idx="minor">
+            <a:schemeClr val="lt1"/>
+          </a:fontRef>
+        </p:style>
+        <p:txBody>
+          <a:bodyPr rtlCol="0" anchor="ctr"/>
+          <a:lstStyle/>
+          <a:p>
+            <a:pPr algn="ctr"/>
+            <a:r>
+              <a:rPr lang="en-US" dirty="0"/>
+              <a:t>Memory</a:t>
+            </a:r>
+          </a:p>
+        </p:txBody>
+      </p:sp>
+      <p:sp>
+        <p:nvSpPr>
+          <p:cNvPr id="6" name="Rectangle 5">
+            <a:extLst>
+              <a:ext uri="{FF2B5EF4-FFF2-40B4-BE49-F238E27FC236}">
+                <a16:creationId xmlns:a16="http://schemas.microsoft.com/office/drawing/2014/main" id="{FB0535E6-4D18-41A6-9986-AF61C011E431}"/>
+              </a:ext>
+            </a:extLst>
+          </p:cNvPr>
+          <p:cNvSpPr/>
+          <p:nvPr/>
+        </p:nvSpPr>
+        <p:spPr>
+          <a:xfrm>
+            <a:off x="4564626" y="4503173"/>
+            <a:ext cx="1371600" cy="973394"/>
+          </a:xfrm>
+          <a:prstGeom prst="rect">
+            <a:avLst/>
+          </a:prstGeom>
+        </p:spPr>
+        <p:style>
+          <a:lnRef idx="1">
+            <a:schemeClr val="accent3"/>
+          </a:lnRef>
+          <a:fillRef idx="3">
+            <a:schemeClr val="accent3"/>
+          </a:fillRef>
+          <a:effectRef idx="2">
+            <a:schemeClr val="accent3"/>
+          </a:effectRef>
+          <a:fontRef idx="minor">
+            <a:schemeClr val="lt1"/>
+          </a:fontRef>
+        </p:style>
+        <p:txBody>
+          <a:bodyPr rtlCol="0" anchor="ctr"/>
+          <a:lstStyle/>
+          <a:p>
+            <a:pPr algn="ctr"/>
+            <a:r>
+              <a:rPr lang="en-US" dirty="0"/>
+              <a:t>I/O</a:t>
+            </a:r>
+          </a:p>
+        </p:txBody>
+      </p:sp>
+      <p:sp>
+        <p:nvSpPr>
+          <p:cNvPr id="7" name="Rectangle 6">
+            <a:extLst>
+              <a:ext uri="{FF2B5EF4-FFF2-40B4-BE49-F238E27FC236}">
+                <a16:creationId xmlns:a16="http://schemas.microsoft.com/office/drawing/2014/main" id="{5F7010C9-EBAC-F9D0-6533-6029E3B6179F}"/>
+              </a:ext>
+            </a:extLst>
+          </p:cNvPr>
+          <p:cNvSpPr/>
+          <p:nvPr/>
+        </p:nvSpPr>
+        <p:spPr>
+          <a:xfrm>
+            <a:off x="6233653" y="4513006"/>
+            <a:ext cx="1371600" cy="973394"/>
+          </a:xfrm>
+          <a:prstGeom prst="rect">
+            <a:avLst/>
+          </a:prstGeom>
+        </p:spPr>
+        <p:style>
+          <a:lnRef idx="1">
+            <a:schemeClr val="accent3"/>
+          </a:lnRef>
+          <a:fillRef idx="3">
+            <a:schemeClr val="accent3"/>
+          </a:fillRef>
+          <a:effectRef idx="2">
+            <a:schemeClr val="accent3"/>
+          </a:effectRef>
+          <a:fontRef idx="minor">
+            <a:schemeClr val="lt1"/>
+          </a:fontRef>
+        </p:style>
+        <p:txBody>
+          <a:bodyPr rtlCol="0" anchor="ctr"/>
+          <a:lstStyle/>
+          <a:p>
+            <a:pPr algn="ctr"/>
+            <a:r>
+              <a:rPr lang="en-US" dirty="0"/>
+              <a:t>I/O</a:t>
+            </a:r>
+          </a:p>
+        </p:txBody>
+      </p:sp>
+      <p:sp>
+        <p:nvSpPr>
+          <p:cNvPr id="8" name="Rectangle 7">
+            <a:extLst>
+              <a:ext uri="{FF2B5EF4-FFF2-40B4-BE49-F238E27FC236}">
+                <a16:creationId xmlns:a16="http://schemas.microsoft.com/office/drawing/2014/main" id="{B43F1024-ACE9-AFC9-2A86-7079F3F95FA1}"/>
+              </a:ext>
+            </a:extLst>
+          </p:cNvPr>
+          <p:cNvSpPr/>
+          <p:nvPr/>
+        </p:nvSpPr>
+        <p:spPr>
+          <a:xfrm>
+            <a:off x="7880557" y="4513006"/>
+            <a:ext cx="1371600" cy="973394"/>
+          </a:xfrm>
+          <a:prstGeom prst="rect">
+            <a:avLst/>
+          </a:prstGeom>
+        </p:spPr>
+        <p:style>
+          <a:lnRef idx="1">
+            <a:schemeClr val="accent3"/>
+          </a:lnRef>
+          <a:fillRef idx="3">
+            <a:schemeClr val="accent3"/>
+          </a:fillRef>
+          <a:effectRef idx="2">
+            <a:schemeClr val="accent3"/>
+          </a:effectRef>
+          <a:fontRef idx="minor">
+            <a:schemeClr val="lt1"/>
+          </a:fontRef>
+        </p:style>
+        <p:txBody>
+          <a:bodyPr rtlCol="0" anchor="ctr"/>
+          <a:lstStyle/>
+          <a:p>
+            <a:pPr algn="ctr"/>
+            <a:r>
+              <a:rPr lang="en-US" dirty="0"/>
+              <a:t>I/O</a:t>
+            </a:r>
+          </a:p>
+        </p:txBody>
+      </p:sp>
+      <p:sp>
+        <p:nvSpPr>
+          <p:cNvPr id="9" name="Rectangle 8">
+            <a:extLst>
+              <a:ext uri="{FF2B5EF4-FFF2-40B4-BE49-F238E27FC236}">
+                <a16:creationId xmlns:a16="http://schemas.microsoft.com/office/drawing/2014/main" id="{221A0183-2597-D342-FF7D-D26ECB381C3A}"/>
+              </a:ext>
+            </a:extLst>
+          </p:cNvPr>
+          <p:cNvSpPr/>
+          <p:nvPr/>
+        </p:nvSpPr>
+        <p:spPr>
+          <a:xfrm>
+            <a:off x="9507796" y="4513006"/>
+            <a:ext cx="1371600" cy="973394"/>
+          </a:xfrm>
+          <a:prstGeom prst="rect">
+            <a:avLst/>
+          </a:prstGeom>
+        </p:spPr>
+        <p:style>
+          <a:lnRef idx="1">
+            <a:schemeClr val="accent3"/>
+          </a:lnRef>
+          <a:fillRef idx="3">
+            <a:schemeClr val="accent3"/>
+          </a:fillRef>
+          <a:effectRef idx="2">
+            <a:schemeClr val="accent3"/>
+          </a:effectRef>
+          <a:fontRef idx="minor">
+            <a:schemeClr val="lt1"/>
+          </a:fontRef>
+        </p:style>
+        <p:txBody>
+          <a:bodyPr rtlCol="0" anchor="ctr"/>
+          <a:lstStyle/>
+          <a:p>
+            <a:pPr algn="ctr"/>
+            <a:r>
+              <a:rPr lang="en-US" dirty="0"/>
+              <a:t>I/O</a:t>
+            </a:r>
+          </a:p>
+        </p:txBody>
+      </p:sp>
+      <p:cxnSp>
+        <p:nvCxnSpPr>
+          <p:cNvPr id="13" name="Straight Connector 12">
+            <a:extLst>
+              <a:ext uri="{FF2B5EF4-FFF2-40B4-BE49-F238E27FC236}">
+                <a16:creationId xmlns:a16="http://schemas.microsoft.com/office/drawing/2014/main" id="{1717BC24-4C0B-DEA9-87EF-C83F8A5B638D}"/>
+              </a:ext>
+            </a:extLst>
+          </p:cNvPr>
+          <p:cNvCxnSpPr/>
+          <p:nvPr/>
+        </p:nvCxnSpPr>
+        <p:spPr>
+          <a:xfrm>
+            <a:off x="3283974" y="2821858"/>
+            <a:ext cx="7855974" cy="0"/>
+          </a:xfrm>
+          <a:prstGeom prst="line">
+            <a:avLst/>
+          </a:prstGeom>
+        </p:spPr>
+        <p:style>
+          <a:lnRef idx="3">
+            <a:schemeClr val="accent1"/>
+          </a:lnRef>
+          <a:fillRef idx="0">
+            <a:schemeClr val="accent1"/>
+          </a:fillRef>
+          <a:effectRef idx="2">
+            <a:schemeClr val="accent1"/>
+          </a:effectRef>
+          <a:fontRef idx="minor">
+            <a:schemeClr val="tx1"/>
+          </a:fontRef>
+        </p:style>
+      </p:cxnSp>
+      <p:cxnSp>
+        <p:nvCxnSpPr>
+          <p:cNvPr id="14" name="Straight Connector 13">
+            <a:extLst>
+              <a:ext uri="{FF2B5EF4-FFF2-40B4-BE49-F238E27FC236}">
+                <a16:creationId xmlns:a16="http://schemas.microsoft.com/office/drawing/2014/main" id="{1AEEEC72-26FB-327E-1815-8792F6D255DB}"/>
+              </a:ext>
+            </a:extLst>
+          </p:cNvPr>
+          <p:cNvCxnSpPr/>
+          <p:nvPr/>
+        </p:nvCxnSpPr>
+        <p:spPr>
+          <a:xfrm>
+            <a:off x="3283974" y="3220065"/>
+            <a:ext cx="7855974" cy="0"/>
+          </a:xfrm>
+          <a:prstGeom prst="line">
+            <a:avLst/>
+          </a:prstGeom>
+        </p:spPr>
+        <p:style>
+          <a:lnRef idx="3">
+            <a:schemeClr val="accent1"/>
+          </a:lnRef>
+          <a:fillRef idx="0">
+            <a:schemeClr val="accent1"/>
+          </a:fillRef>
+          <a:effectRef idx="2">
+            <a:schemeClr val="accent1"/>
+          </a:effectRef>
+          <a:fontRef idx="minor">
+            <a:schemeClr val="tx1"/>
+          </a:fontRef>
+        </p:style>
+      </p:cxnSp>
+      <p:cxnSp>
+        <p:nvCxnSpPr>
+          <p:cNvPr id="15" name="Straight Connector 14">
+            <a:extLst>
+              <a:ext uri="{FF2B5EF4-FFF2-40B4-BE49-F238E27FC236}">
+                <a16:creationId xmlns:a16="http://schemas.microsoft.com/office/drawing/2014/main" id="{26D43E33-69A1-27D9-773D-3B6DD9F3F3AC}"/>
+              </a:ext>
+            </a:extLst>
+          </p:cNvPr>
+          <p:cNvCxnSpPr/>
+          <p:nvPr/>
+        </p:nvCxnSpPr>
+        <p:spPr>
+          <a:xfrm>
+            <a:off x="3283974" y="3706761"/>
+            <a:ext cx="7855974" cy="0"/>
+          </a:xfrm>
+          <a:prstGeom prst="line">
+            <a:avLst/>
+          </a:prstGeom>
+        </p:spPr>
+        <p:style>
+          <a:lnRef idx="3">
+            <a:schemeClr val="accent1"/>
+          </a:lnRef>
+          <a:fillRef idx="0">
+            <a:schemeClr val="accent1"/>
+          </a:fillRef>
+          <a:effectRef idx="2">
+            <a:schemeClr val="accent1"/>
+          </a:effectRef>
+          <a:fontRef idx="minor">
+            <a:schemeClr val="tx1"/>
+          </a:fontRef>
+        </p:style>
+      </p:cxnSp>
+      <p:cxnSp>
+        <p:nvCxnSpPr>
+          <p:cNvPr id="19" name="Straight Arrow Connector 18">
+            <a:extLst>
+              <a:ext uri="{FF2B5EF4-FFF2-40B4-BE49-F238E27FC236}">
+                <a16:creationId xmlns:a16="http://schemas.microsoft.com/office/drawing/2014/main" id="{06CEB464-F53C-6BEC-DC51-A394210EE7CC}"/>
+              </a:ext>
+            </a:extLst>
+          </p:cNvPr>
+          <p:cNvCxnSpPr>
+            <a:cxnSpLocks/>
+            <a:endCxn id="3" idx="2"/>
+          </p:cNvCxnSpPr>
+          <p:nvPr/>
+        </p:nvCxnSpPr>
+        <p:spPr>
+          <a:xfrm flipV="1">
+            <a:off x="7474355" y="2304951"/>
+            <a:ext cx="46403" cy="516907"/>
+          </a:xfrm>
+          <a:prstGeom prst="straightConnector1">
+            <a:avLst/>
+          </a:prstGeom>
+          <a:ln>
+            <a:tailEnd type="triangle"/>
+          </a:ln>
+        </p:spPr>
+        <p:style>
+          <a:lnRef idx="2">
+            <a:schemeClr val="accent1"/>
+          </a:lnRef>
+          <a:fillRef idx="0">
+            <a:schemeClr val="accent1"/>
+          </a:fillRef>
+          <a:effectRef idx="1">
+            <a:schemeClr val="accent1"/>
+          </a:effectRef>
+          <a:fontRef idx="minor">
+            <a:schemeClr val="tx1"/>
+          </a:fontRef>
+        </p:style>
+      </p:cxnSp>
+      <p:cxnSp>
+        <p:nvCxnSpPr>
+          <p:cNvPr id="21" name="Straight Arrow Connector 20">
+            <a:extLst>
+              <a:ext uri="{FF2B5EF4-FFF2-40B4-BE49-F238E27FC236}">
+                <a16:creationId xmlns:a16="http://schemas.microsoft.com/office/drawing/2014/main" id="{FEF7B8B3-B217-3FEE-3419-4CBC67CA3A2E}"/>
+              </a:ext>
+            </a:extLst>
+          </p:cNvPr>
+          <p:cNvCxnSpPr>
+            <a:cxnSpLocks/>
+            <a:endCxn id="6" idx="0"/>
+          </p:cNvCxnSpPr>
+          <p:nvPr/>
+        </p:nvCxnSpPr>
+        <p:spPr>
+          <a:xfrm>
+            <a:off x="5250426" y="3696928"/>
+            <a:ext cx="0" cy="806245"/>
+          </a:xfrm>
+          <a:prstGeom prst="straightConnector1">
+            <a:avLst/>
+          </a:prstGeom>
+          <a:ln>
+            <a:tailEnd type="triangle"/>
+          </a:ln>
+        </p:spPr>
+        <p:style>
+          <a:lnRef idx="2">
+            <a:schemeClr val="accent1"/>
+          </a:lnRef>
+          <a:fillRef idx="0">
+            <a:schemeClr val="accent1"/>
+          </a:fillRef>
+          <a:effectRef idx="1">
+            <a:schemeClr val="accent1"/>
+          </a:effectRef>
+          <a:fontRef idx="minor">
+            <a:schemeClr val="tx1"/>
+          </a:fontRef>
+        </p:style>
+      </p:cxnSp>
+      <p:cxnSp>
+        <p:nvCxnSpPr>
+          <p:cNvPr id="23" name="Straight Arrow Connector 22">
+            <a:extLst>
+              <a:ext uri="{FF2B5EF4-FFF2-40B4-BE49-F238E27FC236}">
+                <a16:creationId xmlns:a16="http://schemas.microsoft.com/office/drawing/2014/main" id="{288FA895-92A9-A508-4EF5-6B4CB3B8337A}"/>
+              </a:ext>
+            </a:extLst>
+          </p:cNvPr>
+          <p:cNvCxnSpPr>
+            <a:cxnSpLocks/>
+            <a:endCxn id="7" idx="0"/>
+          </p:cNvCxnSpPr>
+          <p:nvPr/>
+        </p:nvCxnSpPr>
+        <p:spPr>
+          <a:xfrm>
+            <a:off x="6919453" y="3706761"/>
+            <a:ext cx="0" cy="806245"/>
+          </a:xfrm>
+          <a:prstGeom prst="straightConnector1">
+            <a:avLst/>
+          </a:prstGeom>
+          <a:ln>
+            <a:tailEnd type="triangle"/>
+          </a:ln>
+        </p:spPr>
+        <p:style>
+          <a:lnRef idx="2">
+            <a:schemeClr val="accent1"/>
+          </a:lnRef>
+          <a:fillRef idx="0">
+            <a:schemeClr val="accent1"/>
+          </a:fillRef>
+          <a:effectRef idx="1">
+            <a:schemeClr val="accent1"/>
+          </a:effectRef>
+          <a:fontRef idx="minor">
+            <a:schemeClr val="tx1"/>
+          </a:fontRef>
+        </p:style>
+      </p:cxnSp>
+      <p:cxnSp>
+        <p:nvCxnSpPr>
+          <p:cNvPr id="28" name="Straight Arrow Connector 27">
+            <a:extLst>
+              <a:ext uri="{FF2B5EF4-FFF2-40B4-BE49-F238E27FC236}">
+                <a16:creationId xmlns:a16="http://schemas.microsoft.com/office/drawing/2014/main" id="{9CCDB361-1B13-24FC-0C05-62D14766D458}"/>
+              </a:ext>
+            </a:extLst>
+          </p:cNvPr>
+          <p:cNvCxnSpPr>
+            <a:cxnSpLocks/>
+          </p:cNvCxnSpPr>
+          <p:nvPr/>
+        </p:nvCxnSpPr>
+        <p:spPr>
+          <a:xfrm>
+            <a:off x="8556524" y="3706761"/>
+            <a:ext cx="0" cy="806245"/>
+          </a:xfrm>
+          <a:prstGeom prst="straightConnector1">
+            <a:avLst/>
+          </a:prstGeom>
+          <a:ln>
+            <a:tailEnd type="triangle"/>
+          </a:ln>
+        </p:spPr>
+        <p:style>
+          <a:lnRef idx="2">
+            <a:schemeClr val="accent1"/>
+          </a:lnRef>
+          <a:fillRef idx="0">
+            <a:schemeClr val="accent1"/>
+          </a:fillRef>
+          <a:effectRef idx="1">
+            <a:schemeClr val="accent1"/>
+          </a:effectRef>
+          <a:fontRef idx="minor">
+            <a:schemeClr val="tx1"/>
+          </a:fontRef>
+        </p:style>
+      </p:cxnSp>
+      <p:cxnSp>
+        <p:nvCxnSpPr>
+          <p:cNvPr id="30" name="Straight Arrow Connector 29">
+            <a:extLst>
+              <a:ext uri="{FF2B5EF4-FFF2-40B4-BE49-F238E27FC236}">
+                <a16:creationId xmlns:a16="http://schemas.microsoft.com/office/drawing/2014/main" id="{734137BD-3A79-1D98-B8C7-6C0747FA66CB}"/>
+              </a:ext>
+            </a:extLst>
+          </p:cNvPr>
+          <p:cNvCxnSpPr>
+            <a:cxnSpLocks/>
+            <a:endCxn id="9" idx="0"/>
+          </p:cNvCxnSpPr>
+          <p:nvPr/>
+        </p:nvCxnSpPr>
+        <p:spPr>
+          <a:xfrm>
+            <a:off x="10193596" y="3706761"/>
+            <a:ext cx="0" cy="806245"/>
+          </a:xfrm>
+          <a:prstGeom prst="straightConnector1">
+            <a:avLst/>
+          </a:prstGeom>
+          <a:ln>
+            <a:tailEnd type="triangle"/>
+          </a:ln>
+        </p:spPr>
+        <p:style>
+          <a:lnRef idx="2">
+            <a:schemeClr val="accent1"/>
+          </a:lnRef>
+          <a:fillRef idx="0">
+            <a:schemeClr val="accent1"/>
+          </a:fillRef>
+          <a:effectRef idx="1">
+            <a:schemeClr val="accent1"/>
+          </a:effectRef>
+          <a:fontRef idx="minor">
+            <a:schemeClr val="tx1"/>
+          </a:fontRef>
+        </p:style>
+      </p:cxnSp>
+      <p:sp>
+        <p:nvSpPr>
+          <p:cNvPr id="35" name="TextBox 34">
+            <a:extLst>
+              <a:ext uri="{FF2B5EF4-FFF2-40B4-BE49-F238E27FC236}">
+                <a16:creationId xmlns:a16="http://schemas.microsoft.com/office/drawing/2014/main" id="{E6F6EF56-6876-2B50-3085-3C07663F9EDD}"/>
+              </a:ext>
+            </a:extLst>
+          </p:cNvPr>
+          <p:cNvSpPr txBox="1"/>
+          <p:nvPr/>
+        </p:nvSpPr>
+        <p:spPr>
+          <a:xfrm>
+            <a:off x="10618838" y="2491855"/>
+            <a:ext cx="1081546" cy="369332"/>
+          </a:xfrm>
+          <a:prstGeom prst="rect">
+            <a:avLst/>
+          </a:prstGeom>
+          <a:noFill/>
+        </p:spPr>
+        <p:txBody>
+          <a:bodyPr wrap="square" rtlCol="0">
+            <a:spAutoFit/>
+          </a:bodyPr>
+          <a:lstStyle/>
+          <a:p>
+            <a:r>
+              <a:rPr lang="en-US" dirty="0"/>
+              <a:t>data</a:t>
+            </a:r>
+          </a:p>
+        </p:txBody>
+      </p:sp>
+      <p:sp>
+        <p:nvSpPr>
+          <p:cNvPr id="36" name="TextBox 35">
+            <a:extLst>
+              <a:ext uri="{FF2B5EF4-FFF2-40B4-BE49-F238E27FC236}">
+                <a16:creationId xmlns:a16="http://schemas.microsoft.com/office/drawing/2014/main" id="{B3D18752-7AED-2E73-8995-3D0842AB450C}"/>
+              </a:ext>
+            </a:extLst>
+          </p:cNvPr>
+          <p:cNvSpPr txBox="1"/>
+          <p:nvPr/>
+        </p:nvSpPr>
+        <p:spPr>
+          <a:xfrm>
+            <a:off x="10618838" y="2887915"/>
+            <a:ext cx="1081546" cy="369332"/>
+          </a:xfrm>
+          <a:prstGeom prst="rect">
+            <a:avLst/>
+          </a:prstGeom>
+          <a:noFill/>
+        </p:spPr>
+        <p:txBody>
+          <a:bodyPr wrap="square" rtlCol="0">
+            <a:spAutoFit/>
+          </a:bodyPr>
+          <a:lstStyle/>
+          <a:p>
+            <a:r>
+              <a:rPr lang="en-US" dirty="0"/>
+              <a:t>address</a:t>
+            </a:r>
+          </a:p>
+        </p:txBody>
+      </p:sp>
+      <p:sp>
+        <p:nvSpPr>
+          <p:cNvPr id="37" name="TextBox 36">
+            <a:extLst>
+              <a:ext uri="{FF2B5EF4-FFF2-40B4-BE49-F238E27FC236}">
+                <a16:creationId xmlns:a16="http://schemas.microsoft.com/office/drawing/2014/main" id="{325F7C68-7B81-1635-2179-2D1BB70265ED}"/>
+              </a:ext>
+            </a:extLst>
+          </p:cNvPr>
+          <p:cNvSpPr txBox="1"/>
+          <p:nvPr/>
+        </p:nvSpPr>
+        <p:spPr>
+          <a:xfrm>
+            <a:off x="10648332" y="3377379"/>
+            <a:ext cx="1081546" cy="369332"/>
+          </a:xfrm>
+          <a:prstGeom prst="rect">
+            <a:avLst/>
+          </a:prstGeom>
+          <a:noFill/>
+        </p:spPr>
+        <p:txBody>
+          <a:bodyPr wrap="square" rtlCol="0">
+            <a:spAutoFit/>
+          </a:bodyPr>
+          <a:lstStyle/>
+          <a:p>
+            <a:r>
+              <a:rPr lang="en-US" dirty="0"/>
+              <a:t>control</a:t>
+            </a:r>
+          </a:p>
+        </p:txBody>
+      </p:sp>
+      <p:cxnSp>
+        <p:nvCxnSpPr>
+          <p:cNvPr id="39" name="Straight Arrow Connector 38">
+            <a:extLst>
+              <a:ext uri="{FF2B5EF4-FFF2-40B4-BE49-F238E27FC236}">
+                <a16:creationId xmlns:a16="http://schemas.microsoft.com/office/drawing/2014/main" id="{926E4179-B9DE-933B-3F27-FFCAE35CA328}"/>
+              </a:ext>
+            </a:extLst>
+          </p:cNvPr>
+          <p:cNvCxnSpPr/>
+          <p:nvPr/>
+        </p:nvCxnSpPr>
+        <p:spPr>
+          <a:xfrm>
+            <a:off x="5643716" y="2821858"/>
+            <a:ext cx="0" cy="1691148"/>
+          </a:xfrm>
+          <a:prstGeom prst="straightConnector1">
+            <a:avLst/>
+          </a:prstGeom>
+          <a:ln>
+            <a:tailEnd type="triangle"/>
+          </a:ln>
+        </p:spPr>
+        <p:style>
+          <a:lnRef idx="2">
+            <a:schemeClr val="accent6"/>
+          </a:lnRef>
+          <a:fillRef idx="0">
+            <a:schemeClr val="accent6"/>
+          </a:fillRef>
+          <a:effectRef idx="1">
+            <a:schemeClr val="accent6"/>
+          </a:effectRef>
+          <a:fontRef idx="minor">
+            <a:schemeClr val="tx1"/>
+          </a:fontRef>
+        </p:style>
+      </p:cxnSp>
+      <p:cxnSp>
+        <p:nvCxnSpPr>
+          <p:cNvPr id="40" name="Straight Arrow Connector 39">
+            <a:extLst>
+              <a:ext uri="{FF2B5EF4-FFF2-40B4-BE49-F238E27FC236}">
+                <a16:creationId xmlns:a16="http://schemas.microsoft.com/office/drawing/2014/main" id="{20CBF160-F467-67E8-D095-8238E8B1406F}"/>
+              </a:ext>
+            </a:extLst>
+          </p:cNvPr>
+          <p:cNvCxnSpPr/>
+          <p:nvPr/>
+        </p:nvCxnSpPr>
+        <p:spPr>
+          <a:xfrm>
+            <a:off x="6749845" y="2821858"/>
+            <a:ext cx="0" cy="1691148"/>
+          </a:xfrm>
+          <a:prstGeom prst="straightConnector1">
+            <a:avLst/>
+          </a:prstGeom>
+          <a:ln>
+            <a:tailEnd type="triangle"/>
+          </a:ln>
+        </p:spPr>
+        <p:style>
+          <a:lnRef idx="2">
+            <a:schemeClr val="accent6"/>
+          </a:lnRef>
+          <a:fillRef idx="0">
+            <a:schemeClr val="accent6"/>
+          </a:fillRef>
+          <a:effectRef idx="1">
+            <a:schemeClr val="accent6"/>
+          </a:effectRef>
+          <a:fontRef idx="minor">
+            <a:schemeClr val="tx1"/>
+          </a:fontRef>
+        </p:style>
+      </p:cxnSp>
+      <p:cxnSp>
+        <p:nvCxnSpPr>
+          <p:cNvPr id="41" name="Straight Arrow Connector 40">
+            <a:extLst>
+              <a:ext uri="{FF2B5EF4-FFF2-40B4-BE49-F238E27FC236}">
+                <a16:creationId xmlns:a16="http://schemas.microsoft.com/office/drawing/2014/main" id="{F0876E50-92D0-0FF4-240D-729BD8AC3C92}"/>
+              </a:ext>
+            </a:extLst>
+          </p:cNvPr>
+          <p:cNvCxnSpPr/>
+          <p:nvPr/>
+        </p:nvCxnSpPr>
+        <p:spPr>
+          <a:xfrm>
+            <a:off x="8396748" y="2821858"/>
+            <a:ext cx="0" cy="1691148"/>
+          </a:xfrm>
+          <a:prstGeom prst="straightConnector1">
+            <a:avLst/>
+          </a:prstGeom>
+          <a:ln>
+            <a:tailEnd type="triangle"/>
+          </a:ln>
+        </p:spPr>
+        <p:style>
+          <a:lnRef idx="2">
+            <a:schemeClr val="accent6"/>
+          </a:lnRef>
+          <a:fillRef idx="0">
+            <a:schemeClr val="accent6"/>
+          </a:fillRef>
+          <a:effectRef idx="1">
+            <a:schemeClr val="accent6"/>
+          </a:effectRef>
+          <a:fontRef idx="minor">
+            <a:schemeClr val="tx1"/>
+          </a:fontRef>
+        </p:style>
+      </p:cxnSp>
+      <p:cxnSp>
+        <p:nvCxnSpPr>
+          <p:cNvPr id="42" name="Straight Arrow Connector 41">
+            <a:extLst>
+              <a:ext uri="{FF2B5EF4-FFF2-40B4-BE49-F238E27FC236}">
+                <a16:creationId xmlns:a16="http://schemas.microsoft.com/office/drawing/2014/main" id="{3C324A0B-DB03-C1EA-6418-D52A754A5B7C}"/>
+              </a:ext>
+            </a:extLst>
+          </p:cNvPr>
+          <p:cNvCxnSpPr/>
+          <p:nvPr/>
+        </p:nvCxnSpPr>
+        <p:spPr>
+          <a:xfrm>
+            <a:off x="10023986" y="2821858"/>
+            <a:ext cx="0" cy="1691148"/>
+          </a:xfrm>
+          <a:prstGeom prst="straightConnector1">
+            <a:avLst/>
+          </a:prstGeom>
+          <a:ln>
+            <a:tailEnd type="triangle"/>
+          </a:ln>
+        </p:spPr>
+        <p:style>
+          <a:lnRef idx="2">
+            <a:schemeClr val="accent6"/>
+          </a:lnRef>
+          <a:fillRef idx="0">
+            <a:schemeClr val="accent6"/>
+          </a:fillRef>
+          <a:effectRef idx="1">
+            <a:schemeClr val="accent6"/>
+          </a:effectRef>
+          <a:fontRef idx="minor">
+            <a:schemeClr val="tx1"/>
+          </a:fontRef>
+        </p:style>
+      </p:cxnSp>
+      <p:sp>
+        <p:nvSpPr>
+          <p:cNvPr id="43" name="Rectangle 42">
+            <a:extLst>
+              <a:ext uri="{FF2B5EF4-FFF2-40B4-BE49-F238E27FC236}">
+                <a16:creationId xmlns:a16="http://schemas.microsoft.com/office/drawing/2014/main" id="{A56D26FE-3D9E-E87D-CF11-F6BDCD8566C0}"/>
+              </a:ext>
+            </a:extLst>
+          </p:cNvPr>
+          <p:cNvSpPr/>
+          <p:nvPr/>
+        </p:nvSpPr>
+        <p:spPr>
+          <a:xfrm>
+            <a:off x="1546122" y="4193457"/>
+            <a:ext cx="2563765" cy="2664543"/>
+          </a:xfrm>
+          <a:prstGeom prst="rect">
+            <a:avLst/>
+          </a:prstGeom>
+        </p:spPr>
+        <p:style>
+          <a:lnRef idx="1">
+            <a:schemeClr val="accent5"/>
+          </a:lnRef>
+          <a:fillRef idx="2">
+            <a:schemeClr val="accent5"/>
+          </a:fillRef>
+          <a:effectRef idx="1">
+            <a:schemeClr val="accent5"/>
+          </a:effectRef>
+          <a:fontRef idx="minor">
+            <a:schemeClr val="dk1"/>
+          </a:fontRef>
+        </p:style>
+        <p:txBody>
+          <a:bodyPr rtlCol="0" anchor="ctr"/>
+          <a:lstStyle/>
+          <a:p>
+            <a:pPr algn="ctr"/>
+            <a:endParaRPr lang="en-US" dirty="0"/>
+          </a:p>
+        </p:txBody>
+      </p:sp>
+      <p:cxnSp>
+        <p:nvCxnSpPr>
+          <p:cNvPr id="45" name="Straight Arrow Connector 44">
+            <a:extLst>
+              <a:ext uri="{FF2B5EF4-FFF2-40B4-BE49-F238E27FC236}">
+                <a16:creationId xmlns:a16="http://schemas.microsoft.com/office/drawing/2014/main" id="{E3D0F85A-B3A6-B282-D517-C44233165ED9}"/>
+              </a:ext>
+            </a:extLst>
+          </p:cNvPr>
+          <p:cNvCxnSpPr>
+            <a:cxnSpLocks/>
+            <a:stCxn id="2" idx="2"/>
+            <a:endCxn id="43" idx="0"/>
+          </p:cNvCxnSpPr>
+          <p:nvPr/>
+        </p:nvCxnSpPr>
+        <p:spPr>
+          <a:xfrm>
+            <a:off x="2403987" y="3995540"/>
+            <a:ext cx="424018" cy="197917"/>
+          </a:xfrm>
+          <a:prstGeom prst="straightConnector1">
+            <a:avLst/>
+          </a:prstGeom>
+          <a:ln>
+            <a:tailEnd type="triangle"/>
+          </a:ln>
+        </p:spPr>
+        <p:style>
+          <a:lnRef idx="2">
+            <a:schemeClr val="accent1"/>
+          </a:lnRef>
+          <a:fillRef idx="0">
+            <a:schemeClr val="accent1"/>
+          </a:fillRef>
+          <a:effectRef idx="1">
+            <a:schemeClr val="accent1"/>
+          </a:effectRef>
+          <a:fontRef idx="minor">
+            <a:schemeClr val="tx1"/>
+          </a:fontRef>
+        </p:style>
+      </p:cxnSp>
+      <p:sp>
+        <p:nvSpPr>
+          <p:cNvPr id="47" name="Rectangle 46">
+            <a:extLst>
+              <a:ext uri="{FF2B5EF4-FFF2-40B4-BE49-F238E27FC236}">
+                <a16:creationId xmlns:a16="http://schemas.microsoft.com/office/drawing/2014/main" id="{F9298F10-50A1-F39D-8730-8D1C85D72BFF}"/>
+              </a:ext>
+            </a:extLst>
+          </p:cNvPr>
+          <p:cNvSpPr/>
+          <p:nvPr/>
+        </p:nvSpPr>
+        <p:spPr>
+          <a:xfrm>
+            <a:off x="2379406" y="4354418"/>
+            <a:ext cx="1079092" cy="613950"/>
+          </a:xfrm>
+          <a:prstGeom prst="rect">
+            <a:avLst/>
+          </a:prstGeom>
+        </p:spPr>
+        <p:style>
+          <a:lnRef idx="2">
+            <a:schemeClr val="accent1">
+              <a:shade val="15000"/>
+            </a:schemeClr>
+          </a:lnRef>
+          <a:fillRef idx="1">
+            <a:schemeClr val="accent1"/>
+          </a:fillRef>
+          <a:effectRef idx="0">
+            <a:schemeClr val="accent1"/>
+          </a:effectRef>
+          <a:fontRef idx="minor">
+            <a:schemeClr val="lt1"/>
+          </a:fontRef>
+        </p:style>
+        <p:txBody>
+          <a:bodyPr rtlCol="0" anchor="ctr"/>
+          <a:lstStyle/>
+          <a:p>
+            <a:pPr algn="ctr"/>
+            <a:r>
+              <a:rPr lang="en-US" dirty="0"/>
+              <a:t>ALU</a:t>
+            </a:r>
+          </a:p>
+          <a:p>
+            <a:pPr algn="ctr"/>
+            <a:r>
+              <a:rPr lang="en-US" dirty="0"/>
+              <a:t>+</a:t>
+            </a:r>
+          </a:p>
+        </p:txBody>
+      </p:sp>
+      <p:sp>
+        <p:nvSpPr>
+          <p:cNvPr id="48" name="Rectangle 47">
+            <a:extLst>
+              <a:ext uri="{FF2B5EF4-FFF2-40B4-BE49-F238E27FC236}">
+                <a16:creationId xmlns:a16="http://schemas.microsoft.com/office/drawing/2014/main" id="{E0C3861F-732F-5F4D-72E9-2524DF64C09B}"/>
+              </a:ext>
+            </a:extLst>
+          </p:cNvPr>
+          <p:cNvSpPr/>
+          <p:nvPr/>
+        </p:nvSpPr>
+        <p:spPr>
+          <a:xfrm>
+            <a:off x="2088127" y="4989873"/>
+            <a:ext cx="1539975" cy="820991"/>
+          </a:xfrm>
+          <a:prstGeom prst="rect">
+            <a:avLst/>
+          </a:prstGeom>
+          <a:solidFill>
+            <a:schemeClr val="accent4">
+              <a:lumMod val="60000"/>
+              <a:lumOff val="40000"/>
+            </a:schemeClr>
+          </a:solidFill>
+        </p:spPr>
+        <p:style>
+          <a:lnRef idx="2">
+            <a:schemeClr val="accent1">
+              <a:shade val="15000"/>
+            </a:schemeClr>
+          </a:lnRef>
+          <a:fillRef idx="1">
+            <a:schemeClr val="accent1"/>
+          </a:fillRef>
+          <a:effectRef idx="0">
+            <a:schemeClr val="accent1"/>
+          </a:effectRef>
+          <a:fontRef idx="minor">
+            <a:schemeClr val="lt1"/>
+          </a:fontRef>
+        </p:style>
+        <p:txBody>
+          <a:bodyPr rtlCol="0" anchor="ctr"/>
+          <a:lstStyle/>
+          <a:p>
+            <a:pPr algn="ctr"/>
+            <a:r>
+              <a:rPr lang="en-US" dirty="0"/>
+              <a:t>CU:</a:t>
+            </a:r>
+          </a:p>
+          <a:p>
+            <a:pPr algn="ctr"/>
+            <a:r>
+              <a:rPr lang="en-US" dirty="0"/>
+              <a:t>int sum = </a:t>
+            </a:r>
+            <a:r>
+              <a:rPr lang="en-US" dirty="0" err="1"/>
+              <a:t>x+y</a:t>
+            </a:r>
+            <a:r>
+              <a:rPr lang="en-US" dirty="0"/>
+              <a:t>;</a:t>
+            </a:r>
+          </a:p>
+        </p:txBody>
+      </p:sp>
+      <p:sp>
+        <p:nvSpPr>
+          <p:cNvPr id="51" name="Rectangle 50">
+            <a:extLst>
+              <a:ext uri="{FF2B5EF4-FFF2-40B4-BE49-F238E27FC236}">
+                <a16:creationId xmlns:a16="http://schemas.microsoft.com/office/drawing/2014/main" id="{BAEA0272-31CB-B7C4-5AF6-DCA831B2D9B4}"/>
+              </a:ext>
+            </a:extLst>
+          </p:cNvPr>
+          <p:cNvSpPr/>
+          <p:nvPr/>
+        </p:nvSpPr>
+        <p:spPr>
+          <a:xfrm>
+            <a:off x="1819588" y="5948516"/>
+            <a:ext cx="2201806" cy="820991"/>
+          </a:xfrm>
+          <a:prstGeom prst="rect">
+            <a:avLst/>
+          </a:prstGeom>
+          <a:solidFill>
+            <a:schemeClr val="accent6">
+              <a:lumMod val="60000"/>
+              <a:lumOff val="40000"/>
+            </a:schemeClr>
+          </a:solidFill>
+        </p:spPr>
+        <p:style>
+          <a:lnRef idx="2">
+            <a:schemeClr val="accent1">
+              <a:shade val="15000"/>
+            </a:schemeClr>
+          </a:lnRef>
+          <a:fillRef idx="1">
+            <a:schemeClr val="accent1"/>
+          </a:fillRef>
+          <a:effectRef idx="0">
+            <a:schemeClr val="accent1"/>
+          </a:effectRef>
+          <a:fontRef idx="minor">
+            <a:schemeClr val="lt1"/>
+          </a:fontRef>
+        </p:style>
+        <p:txBody>
+          <a:bodyPr rtlCol="0" anchor="ctr"/>
+          <a:lstStyle/>
+          <a:p>
+            <a:pPr algn="ctr"/>
+            <a:r>
+              <a:rPr lang="en-US" dirty="0"/>
+              <a:t>CPU memory</a:t>
+            </a:r>
+          </a:p>
+          <a:p>
+            <a:pPr algn="ctr"/>
+            <a:endParaRPr lang="en-US" dirty="0"/>
+          </a:p>
+        </p:txBody>
+      </p:sp>
+      <p:sp>
+        <p:nvSpPr>
+          <p:cNvPr id="18" name="Rectangle 17">
+            <a:extLst>
+              <a:ext uri="{FF2B5EF4-FFF2-40B4-BE49-F238E27FC236}">
+                <a16:creationId xmlns:a16="http://schemas.microsoft.com/office/drawing/2014/main" id="{36022EB6-B5DC-D912-8B81-2A8D9100E216}"/>
+              </a:ext>
+            </a:extLst>
+          </p:cNvPr>
+          <p:cNvSpPr/>
+          <p:nvPr/>
+        </p:nvSpPr>
+        <p:spPr>
+          <a:xfrm>
+            <a:off x="5240593" y="157317"/>
+            <a:ext cx="1995949" cy="1344556"/>
+          </a:xfrm>
+          <a:prstGeom prst="rect">
+            <a:avLst/>
+          </a:prstGeom>
+        </p:spPr>
+        <p:style>
+          <a:lnRef idx="2">
+            <a:schemeClr val="accent6">
+              <a:shade val="15000"/>
+            </a:schemeClr>
+          </a:lnRef>
+          <a:fillRef idx="1">
+            <a:schemeClr val="accent6"/>
+          </a:fillRef>
+          <a:effectRef idx="0">
+            <a:schemeClr val="accent6"/>
+          </a:effectRef>
+          <a:fontRef idx="minor">
+            <a:schemeClr val="lt1"/>
+          </a:fontRef>
+        </p:style>
+        <p:txBody>
+          <a:bodyPr rtlCol="0" anchor="ctr"/>
+          <a:lstStyle/>
+          <a:p>
+            <a:pPr algn="ctr"/>
+            <a:r>
+              <a:rPr lang="en-US" dirty="0"/>
+              <a:t>Text</a:t>
+            </a:r>
+          </a:p>
+          <a:p>
+            <a:pPr algn="ctr"/>
+            <a:r>
+              <a:rPr lang="en-US" dirty="0"/>
+              <a:t>Int x = 2;</a:t>
+            </a:r>
+          </a:p>
+          <a:p>
+            <a:pPr algn="ctr"/>
+            <a:r>
+              <a:rPr lang="en-US" dirty="0"/>
+              <a:t>Int y = 3;</a:t>
+            </a:r>
+          </a:p>
+          <a:p>
+            <a:pPr algn="ctr"/>
+            <a:r>
+              <a:rPr lang="en-US" dirty="0"/>
+              <a:t>Int sum  = x + y;</a:t>
+            </a:r>
+          </a:p>
+          <a:p>
+            <a:pPr algn="ctr"/>
+            <a:endParaRPr lang="en-US" dirty="0"/>
+          </a:p>
+        </p:txBody>
+      </p:sp>
+      <p:sp>
+        <p:nvSpPr>
+          <p:cNvPr id="20" name="Rectangle 19">
+            <a:extLst>
+              <a:ext uri="{FF2B5EF4-FFF2-40B4-BE49-F238E27FC236}">
+                <a16:creationId xmlns:a16="http://schemas.microsoft.com/office/drawing/2014/main" id="{B51D41D7-B953-31A8-2015-BBBD9402430F}"/>
+              </a:ext>
+            </a:extLst>
+          </p:cNvPr>
+          <p:cNvSpPr/>
+          <p:nvPr/>
+        </p:nvSpPr>
+        <p:spPr>
+          <a:xfrm>
+            <a:off x="8133120" y="521108"/>
+            <a:ext cx="1042219" cy="698083"/>
+          </a:xfrm>
+          <a:prstGeom prst="rect">
+            <a:avLst/>
+          </a:prstGeom>
+        </p:spPr>
+        <p:style>
+          <a:lnRef idx="2">
+            <a:schemeClr val="accent2">
+              <a:shade val="15000"/>
+            </a:schemeClr>
+          </a:lnRef>
+          <a:fillRef idx="1">
+            <a:schemeClr val="accent2"/>
+          </a:fillRef>
+          <a:effectRef idx="0">
+            <a:schemeClr val="accent2"/>
+          </a:effectRef>
+          <a:fontRef idx="minor">
+            <a:schemeClr val="lt1"/>
+          </a:fontRef>
+        </p:style>
+        <p:txBody>
+          <a:bodyPr rtlCol="0" anchor="ctr"/>
+          <a:lstStyle/>
+          <a:p>
+            <a:pPr algn="ctr"/>
+            <a:r>
+              <a:rPr lang="en-US" dirty="0"/>
+              <a:t>data</a:t>
+            </a:r>
+          </a:p>
+        </p:txBody>
+      </p:sp>
+      <p:sp>
+        <p:nvSpPr>
+          <p:cNvPr id="22" name="Rectangle 21">
+            <a:extLst>
+              <a:ext uri="{FF2B5EF4-FFF2-40B4-BE49-F238E27FC236}">
+                <a16:creationId xmlns:a16="http://schemas.microsoft.com/office/drawing/2014/main" id="{C96D612C-A28D-4853-4308-284852299EAD}"/>
+              </a:ext>
+            </a:extLst>
+          </p:cNvPr>
+          <p:cNvSpPr/>
+          <p:nvPr/>
+        </p:nvSpPr>
+        <p:spPr>
+          <a:xfrm>
+            <a:off x="9252157" y="521109"/>
+            <a:ext cx="1042219" cy="698083"/>
+          </a:xfrm>
+          <a:prstGeom prst="rect">
+            <a:avLst/>
+          </a:prstGeom>
+        </p:spPr>
+        <p:style>
+          <a:lnRef idx="2">
+            <a:schemeClr val="accent2">
+              <a:shade val="15000"/>
+            </a:schemeClr>
+          </a:lnRef>
+          <a:fillRef idx="1">
+            <a:schemeClr val="accent2"/>
+          </a:fillRef>
+          <a:effectRef idx="0">
+            <a:schemeClr val="accent2"/>
+          </a:effectRef>
+          <a:fontRef idx="minor">
+            <a:schemeClr val="lt1"/>
+          </a:fontRef>
+        </p:style>
+        <p:txBody>
+          <a:bodyPr rtlCol="0" anchor="ctr"/>
+          <a:lstStyle/>
+          <a:p>
+            <a:pPr algn="ctr"/>
+            <a:r>
+              <a:rPr lang="en-US" dirty="0" err="1"/>
+              <a:t>bss</a:t>
+            </a:r>
+            <a:endParaRPr lang="en-US" dirty="0"/>
+          </a:p>
+        </p:txBody>
+      </p:sp>
+      <p:sp>
+        <p:nvSpPr>
+          <p:cNvPr id="24" name="Rectangle 23">
+            <a:extLst>
+              <a:ext uri="{FF2B5EF4-FFF2-40B4-BE49-F238E27FC236}">
+                <a16:creationId xmlns:a16="http://schemas.microsoft.com/office/drawing/2014/main" id="{0C9C4698-8BEB-EA0C-4744-6491F47F126B}"/>
+              </a:ext>
+            </a:extLst>
+          </p:cNvPr>
+          <p:cNvSpPr/>
+          <p:nvPr/>
+        </p:nvSpPr>
+        <p:spPr>
+          <a:xfrm>
+            <a:off x="5377630" y="1564566"/>
+            <a:ext cx="3178894" cy="698083"/>
+          </a:xfrm>
+          <a:prstGeom prst="rect">
+            <a:avLst/>
+          </a:prstGeom>
+        </p:spPr>
+        <p:style>
+          <a:lnRef idx="2">
+            <a:schemeClr val="accent3">
+              <a:shade val="15000"/>
+            </a:schemeClr>
+          </a:lnRef>
+          <a:fillRef idx="1">
+            <a:schemeClr val="accent3"/>
+          </a:fillRef>
+          <a:effectRef idx="0">
+            <a:schemeClr val="accent3"/>
+          </a:effectRef>
+          <a:fontRef idx="minor">
+            <a:schemeClr val="lt1"/>
+          </a:fontRef>
+        </p:style>
+        <p:txBody>
+          <a:bodyPr rtlCol="0" anchor="ctr"/>
+          <a:lstStyle/>
+          <a:p>
+            <a:pPr algn="ctr"/>
+            <a:r>
+              <a:rPr lang="en-US" dirty="0"/>
+              <a:t>stack</a:t>
+            </a:r>
+          </a:p>
+        </p:txBody>
+      </p:sp>
+      <p:sp>
+        <p:nvSpPr>
+          <p:cNvPr id="25" name="Rectangle 24">
+            <a:extLst>
+              <a:ext uri="{FF2B5EF4-FFF2-40B4-BE49-F238E27FC236}">
+                <a16:creationId xmlns:a16="http://schemas.microsoft.com/office/drawing/2014/main" id="{95B4F104-7209-F2FB-6D03-FA8ABB4E9A23}"/>
+              </a:ext>
+            </a:extLst>
+          </p:cNvPr>
+          <p:cNvSpPr/>
+          <p:nvPr/>
+        </p:nvSpPr>
+        <p:spPr>
+          <a:xfrm>
+            <a:off x="8914177" y="1425329"/>
+            <a:ext cx="1042219" cy="698083"/>
+          </a:xfrm>
+          <a:prstGeom prst="rect">
+            <a:avLst/>
+          </a:prstGeom>
+        </p:spPr>
+        <p:style>
+          <a:lnRef idx="2">
+            <a:schemeClr val="accent3">
+              <a:shade val="15000"/>
+            </a:schemeClr>
+          </a:lnRef>
+          <a:fillRef idx="1">
+            <a:schemeClr val="accent3"/>
+          </a:fillRef>
+          <a:effectRef idx="0">
+            <a:schemeClr val="accent3"/>
+          </a:effectRef>
+          <a:fontRef idx="minor">
+            <a:schemeClr val="lt1"/>
+          </a:fontRef>
+        </p:style>
+        <p:txBody>
+          <a:bodyPr rtlCol="0" anchor="ctr"/>
+          <a:lstStyle/>
+          <a:p>
+            <a:pPr algn="ctr"/>
+            <a:r>
+              <a:rPr lang="en-US" dirty="0"/>
+              <a:t>heap</a:t>
+            </a:r>
+          </a:p>
+        </p:txBody>
+      </p:sp>
+      <p:sp>
+        <p:nvSpPr>
+          <p:cNvPr id="46" name="Rectangle 45">
+            <a:extLst>
+              <a:ext uri="{FF2B5EF4-FFF2-40B4-BE49-F238E27FC236}">
+                <a16:creationId xmlns:a16="http://schemas.microsoft.com/office/drawing/2014/main" id="{6200B784-847F-29CC-6FED-F31AC03C74CF}"/>
+              </a:ext>
+            </a:extLst>
+          </p:cNvPr>
+          <p:cNvSpPr/>
+          <p:nvPr/>
+        </p:nvSpPr>
+        <p:spPr>
+          <a:xfrm>
+            <a:off x="6489595" y="1647534"/>
+            <a:ext cx="737421" cy="426433"/>
+          </a:xfrm>
+          <a:prstGeom prst="rect">
+            <a:avLst/>
+          </a:prstGeom>
+        </p:spPr>
+        <p:style>
+          <a:lnRef idx="0">
+            <a:schemeClr val="accent2"/>
+          </a:lnRef>
+          <a:fillRef idx="3">
+            <a:schemeClr val="accent2"/>
+          </a:fillRef>
+          <a:effectRef idx="3">
+            <a:schemeClr val="accent2"/>
+          </a:effectRef>
+          <a:fontRef idx="minor">
+            <a:schemeClr val="lt1"/>
+          </a:fontRef>
+        </p:style>
+        <p:txBody>
+          <a:bodyPr rtlCol="0" anchor="ctr"/>
+          <a:lstStyle/>
+          <a:p>
+            <a:pPr algn="ctr"/>
+            <a:r>
+              <a:rPr lang="en-US" dirty="0"/>
+              <a:t>y = 3</a:t>
+            </a:r>
+          </a:p>
+        </p:txBody>
+      </p:sp>
+      <p:sp>
+        <p:nvSpPr>
+          <p:cNvPr id="49" name="Rectangle 48">
+            <a:extLst>
+              <a:ext uri="{FF2B5EF4-FFF2-40B4-BE49-F238E27FC236}">
+                <a16:creationId xmlns:a16="http://schemas.microsoft.com/office/drawing/2014/main" id="{03A851F6-99CF-5122-120D-71203A12A0DC}"/>
+              </a:ext>
+            </a:extLst>
+          </p:cNvPr>
+          <p:cNvSpPr/>
+          <p:nvPr/>
+        </p:nvSpPr>
+        <p:spPr>
+          <a:xfrm>
+            <a:off x="1908074" y="6180847"/>
+            <a:ext cx="737421" cy="426433"/>
+          </a:xfrm>
+          <a:prstGeom prst="rect">
+            <a:avLst/>
+          </a:prstGeom>
+        </p:spPr>
+        <p:style>
+          <a:lnRef idx="2">
+            <a:schemeClr val="accent5">
+              <a:shade val="15000"/>
+            </a:schemeClr>
+          </a:lnRef>
+          <a:fillRef idx="1">
+            <a:schemeClr val="accent5"/>
+          </a:fillRef>
+          <a:effectRef idx="0">
+            <a:schemeClr val="accent5"/>
+          </a:effectRef>
+          <a:fontRef idx="minor">
+            <a:schemeClr val="lt1"/>
+          </a:fontRef>
+        </p:style>
+        <p:txBody>
+          <a:bodyPr rtlCol="0" anchor="ctr"/>
+          <a:lstStyle/>
+          <a:p>
+            <a:pPr algn="ctr"/>
+            <a:r>
+              <a:rPr lang="en-US" dirty="0"/>
+              <a:t>X = 2</a:t>
+            </a:r>
+          </a:p>
+        </p:txBody>
+      </p:sp>
+      <p:sp>
+        <p:nvSpPr>
+          <p:cNvPr id="53" name="Rectangle 52">
+            <a:extLst>
+              <a:ext uri="{FF2B5EF4-FFF2-40B4-BE49-F238E27FC236}">
+                <a16:creationId xmlns:a16="http://schemas.microsoft.com/office/drawing/2014/main" id="{A415E958-A7D4-67DA-82FC-D2F7AFABD3DB}"/>
+              </a:ext>
+            </a:extLst>
+          </p:cNvPr>
+          <p:cNvSpPr/>
+          <p:nvPr/>
+        </p:nvSpPr>
+        <p:spPr>
+          <a:xfrm>
+            <a:off x="2684823" y="6145794"/>
+            <a:ext cx="737421" cy="426433"/>
+          </a:xfrm>
+          <a:prstGeom prst="rect">
+            <a:avLst/>
+          </a:prstGeom>
+        </p:spPr>
+        <p:style>
+          <a:lnRef idx="0">
+            <a:schemeClr val="accent2"/>
+          </a:lnRef>
+          <a:fillRef idx="3">
+            <a:schemeClr val="accent2"/>
+          </a:fillRef>
+          <a:effectRef idx="3">
+            <a:schemeClr val="accent2"/>
+          </a:effectRef>
+          <a:fontRef idx="minor">
+            <a:schemeClr val="lt1"/>
+          </a:fontRef>
+        </p:style>
+        <p:txBody>
+          <a:bodyPr rtlCol="0" anchor="ctr"/>
+          <a:lstStyle/>
+          <a:p>
+            <a:pPr algn="ctr"/>
+            <a:r>
+              <a:rPr lang="en-US" dirty="0"/>
+              <a:t>y = 3</a:t>
+            </a:r>
+          </a:p>
+        </p:txBody>
+      </p:sp>
+      <p:sp>
+        <p:nvSpPr>
+          <p:cNvPr id="57" name="Rectangle 56">
+            <a:extLst>
+              <a:ext uri="{FF2B5EF4-FFF2-40B4-BE49-F238E27FC236}">
+                <a16:creationId xmlns:a16="http://schemas.microsoft.com/office/drawing/2014/main" id="{3B8CD768-BFF3-F9B7-D9D9-DC8C0006C514}"/>
+              </a:ext>
+            </a:extLst>
+          </p:cNvPr>
+          <p:cNvSpPr/>
+          <p:nvPr/>
+        </p:nvSpPr>
+        <p:spPr>
+          <a:xfrm>
+            <a:off x="7463607" y="1681316"/>
+            <a:ext cx="995528" cy="344119"/>
+          </a:xfrm>
+          <a:prstGeom prst="rect">
+            <a:avLst/>
+          </a:prstGeom>
+        </p:spPr>
+        <p:style>
+          <a:lnRef idx="2">
+            <a:schemeClr val="accent6">
+              <a:shade val="15000"/>
+            </a:schemeClr>
+          </a:lnRef>
+          <a:fillRef idx="1">
+            <a:schemeClr val="accent6"/>
+          </a:fillRef>
+          <a:effectRef idx="0">
+            <a:schemeClr val="accent6"/>
+          </a:effectRef>
+          <a:fontRef idx="minor">
+            <a:schemeClr val="lt1"/>
+          </a:fontRef>
+        </p:style>
+        <p:txBody>
+          <a:bodyPr rtlCol="0" anchor="ctr"/>
+          <a:lstStyle/>
+          <a:p>
+            <a:pPr algn="ctr"/>
+            <a:r>
+              <a:rPr lang="en-US" dirty="0"/>
+              <a:t>Sum = 5 </a:t>
+            </a:r>
+          </a:p>
+        </p:txBody>
+      </p:sp>
+      <p:sp>
+        <p:nvSpPr>
+          <p:cNvPr id="58" name="TextBox 57">
+            <a:extLst>
+              <a:ext uri="{FF2B5EF4-FFF2-40B4-BE49-F238E27FC236}">
+                <a16:creationId xmlns:a16="http://schemas.microsoft.com/office/drawing/2014/main" id="{AF5B0559-0039-A01F-CDA7-8F739BB9CA1E}"/>
+              </a:ext>
+            </a:extLst>
+          </p:cNvPr>
+          <p:cNvSpPr txBox="1"/>
+          <p:nvPr/>
+        </p:nvSpPr>
+        <p:spPr>
+          <a:xfrm>
+            <a:off x="119844" y="-47077"/>
+            <a:ext cx="3626247" cy="3139321"/>
+          </a:xfrm>
+          <a:prstGeom prst="rect">
+            <a:avLst/>
+          </a:prstGeom>
+          <a:noFill/>
+        </p:spPr>
+        <p:txBody>
+          <a:bodyPr wrap="square" rtlCol="0">
+            <a:spAutoFit/>
+          </a:bodyPr>
+          <a:lstStyle/>
+          <a:p>
+            <a:r>
+              <a:rPr lang="en-US" dirty="0" err="1"/>
+              <a:t>fCPU</a:t>
+            </a:r>
+            <a:r>
+              <a:rPr lang="en-US" dirty="0"/>
+              <a:t> &gt;&gt;&gt; </a:t>
+            </a:r>
+            <a:r>
+              <a:rPr lang="en-US" dirty="0" err="1"/>
+              <a:t>fRAM</a:t>
+            </a:r>
+            <a:endParaRPr lang="en-US" dirty="0"/>
+          </a:p>
+          <a:p>
+            <a:pPr marL="285750" indent="-285750">
+              <a:buFont typeface="Symbol" panose="05050102010706020507" pitchFamily="18" charset="2"/>
+              <a:buChar char="Þ"/>
+            </a:pPr>
+            <a:r>
+              <a:rPr lang="en-US" dirty="0"/>
+              <a:t>von-</a:t>
+            </a:r>
+            <a:r>
+              <a:rPr lang="en-US" dirty="0" err="1"/>
+              <a:t>neuman</a:t>
+            </a:r>
+            <a:r>
+              <a:rPr lang="en-US" dirty="0"/>
+              <a:t> bottle-neck</a:t>
+            </a:r>
+          </a:p>
+          <a:p>
+            <a:pPr marL="285750" indent="-285750">
+              <a:buFont typeface="Symbol" panose="05050102010706020507" pitchFamily="18" charset="2"/>
+              <a:buChar char="Þ"/>
+            </a:pPr>
+            <a:endParaRPr lang="en-US" dirty="0"/>
+          </a:p>
+          <a:p>
+            <a:pPr marL="342900" indent="-342900">
+              <a:buAutoNum type="arabicPeriod"/>
+            </a:pPr>
+            <a:r>
+              <a:rPr lang="en-US" dirty="0"/>
+              <a:t>New ram type</a:t>
+            </a:r>
+          </a:p>
+          <a:p>
+            <a:r>
+              <a:rPr lang="en-US" dirty="0"/>
+              <a:t>DDR2, R3, R4, R5 </a:t>
+            </a:r>
+          </a:p>
+          <a:p>
+            <a:r>
+              <a:rPr lang="en-US" dirty="0"/>
+              <a:t>2k6, 3200…..</a:t>
+            </a:r>
+          </a:p>
+          <a:p>
+            <a:r>
+              <a:rPr lang="en-US" dirty="0"/>
+              <a:t>2. Cache L1, L2, L3</a:t>
+            </a:r>
+          </a:p>
+          <a:p>
+            <a:r>
+              <a:rPr lang="en-US" dirty="0"/>
+              <a:t>3. multi-thread</a:t>
+            </a:r>
+          </a:p>
+          <a:p>
+            <a:pPr marL="285750" indent="-285750">
+              <a:buFont typeface="Wingdings" panose="05000000000000000000" pitchFamily="2" charset="2"/>
+              <a:buChar char="è"/>
+            </a:pPr>
+            <a:r>
+              <a:rPr lang="en-US" dirty="0"/>
+              <a:t>CPU </a:t>
+            </a:r>
+            <a:r>
+              <a:rPr lang="en-US" dirty="0" err="1"/>
+              <a:t>làm</a:t>
+            </a:r>
+            <a:r>
+              <a:rPr lang="en-US" dirty="0"/>
+              <a:t> 1 </a:t>
+            </a:r>
+            <a:r>
+              <a:rPr lang="en-US" dirty="0" err="1"/>
+              <a:t>công</a:t>
+            </a:r>
+            <a:r>
+              <a:rPr lang="en-US" dirty="0"/>
+              <a:t> </a:t>
+            </a:r>
+            <a:r>
+              <a:rPr lang="en-US" dirty="0" err="1"/>
+              <a:t>việc</a:t>
+            </a:r>
+            <a:r>
+              <a:rPr lang="en-US" dirty="0"/>
+              <a:t> </a:t>
+            </a:r>
+            <a:r>
+              <a:rPr lang="en-US" dirty="0" err="1"/>
+              <a:t>khác</a:t>
+            </a:r>
+            <a:endParaRPr lang="en-US" dirty="0"/>
+          </a:p>
+          <a:p>
+            <a:pPr marL="285750" indent="-285750">
+              <a:buFont typeface="Wingdings" panose="05000000000000000000" pitchFamily="2" charset="2"/>
+              <a:buChar char="è"/>
+            </a:pPr>
+            <a:endParaRPr lang="en-US" dirty="0"/>
+          </a:p>
+          <a:p>
+            <a:r>
+              <a:rPr lang="en-US" dirty="0"/>
+              <a:t>4. New architecture: Harvard</a:t>
+            </a:r>
+          </a:p>
+        </p:txBody>
+      </p:sp>
+      <p:sp>
+        <p:nvSpPr>
+          <p:cNvPr id="61" name="Rectangle 60">
+            <a:extLst>
+              <a:ext uri="{FF2B5EF4-FFF2-40B4-BE49-F238E27FC236}">
+                <a16:creationId xmlns:a16="http://schemas.microsoft.com/office/drawing/2014/main" id="{1A15C1C3-EED8-EFF9-50D6-C74DF4B65780}"/>
+              </a:ext>
+            </a:extLst>
+          </p:cNvPr>
+          <p:cNvSpPr/>
+          <p:nvPr/>
+        </p:nvSpPr>
+        <p:spPr>
+          <a:xfrm>
+            <a:off x="2239312" y="3746710"/>
+            <a:ext cx="1026238" cy="155013"/>
+          </a:xfrm>
+          <a:prstGeom prst="rect">
+            <a:avLst/>
+          </a:prstGeom>
+        </p:spPr>
+        <p:style>
+          <a:lnRef idx="2">
+            <a:schemeClr val="accent1">
+              <a:shade val="15000"/>
+            </a:schemeClr>
+          </a:lnRef>
+          <a:fillRef idx="1">
+            <a:schemeClr val="accent1"/>
+          </a:fillRef>
+          <a:effectRef idx="0">
+            <a:schemeClr val="accent1"/>
+          </a:effectRef>
+          <a:fontRef idx="minor">
+            <a:schemeClr val="lt1"/>
+          </a:fontRef>
+        </p:style>
+        <p:txBody>
+          <a:bodyPr rtlCol="0" anchor="ctr"/>
+          <a:lstStyle/>
+          <a:p>
+            <a:pPr algn="ctr"/>
+            <a:r>
+              <a:rPr lang="en-US" dirty="0"/>
+              <a:t>L1</a:t>
+            </a:r>
+          </a:p>
+        </p:txBody>
+      </p:sp>
+      <p:sp>
+        <p:nvSpPr>
+          <p:cNvPr id="63" name="Rectangle 62">
+            <a:extLst>
+              <a:ext uri="{FF2B5EF4-FFF2-40B4-BE49-F238E27FC236}">
+                <a16:creationId xmlns:a16="http://schemas.microsoft.com/office/drawing/2014/main" id="{F3811E46-1992-4929-0660-D720F763F90F}"/>
+              </a:ext>
+            </a:extLst>
+          </p:cNvPr>
+          <p:cNvSpPr/>
+          <p:nvPr/>
+        </p:nvSpPr>
+        <p:spPr>
+          <a:xfrm>
+            <a:off x="4626078" y="1621549"/>
+            <a:ext cx="1426896" cy="698083"/>
+          </a:xfrm>
+          <a:prstGeom prst="rect">
+            <a:avLst/>
+          </a:prstGeom>
+        </p:spPr>
+        <p:style>
+          <a:lnRef idx="2">
+            <a:schemeClr val="accent1">
+              <a:shade val="15000"/>
+            </a:schemeClr>
+          </a:lnRef>
+          <a:fillRef idx="1">
+            <a:schemeClr val="accent1"/>
+          </a:fillRef>
+          <a:effectRef idx="0">
+            <a:schemeClr val="accent1"/>
+          </a:effectRef>
+          <a:fontRef idx="minor">
+            <a:schemeClr val="lt1"/>
+          </a:fontRef>
+        </p:style>
+        <p:txBody>
+          <a:bodyPr rtlCol="0" anchor="ctr"/>
+          <a:lstStyle/>
+          <a:p>
+            <a:pPr algn="ctr"/>
+            <a:r>
+              <a:rPr lang="en-US" dirty="0"/>
+              <a:t>L3</a:t>
+            </a:r>
+          </a:p>
+          <a:p>
+            <a:pPr algn="ctr"/>
+            <a:endParaRPr lang="en-US" dirty="0"/>
+          </a:p>
+        </p:txBody>
+      </p:sp>
+    </p:spTree>
+    <p:extLst>
+      <p:ext uri="{BB962C8B-B14F-4D97-AF65-F5344CB8AC3E}">
+        <p14:creationId xmlns:p14="http://schemas.microsoft.com/office/powerpoint/2010/main" val="308887287"/>
+      </p:ext>
+    </p:extLst>
+  </p:cSld>
+  <p:clrMapOvr>
+    <a:masterClrMapping/>
+  </p:clrMapOvr>
+</p:sld>
+</file>
+
+<file path=ppt/slides/slide6.xml><?xml version="1.0" encoding="utf-8"?>
+<p:sld xmlns:a="http://schemas.openxmlformats.org/drawingml/2006/main" xmlns:r="http://schemas.openxmlformats.org/officeDocument/2006/relationships" xmlns:p="http://schemas.openxmlformats.org/presentationml/2006/main">
+  <p:cSld>
+    <p:spTree>
+      <p:nvGrpSpPr>
+        <p:cNvPr id="1" name="">
+          <a:extLst>
+            <a:ext uri="{FF2B5EF4-FFF2-40B4-BE49-F238E27FC236}">
+              <a16:creationId xmlns:a16="http://schemas.microsoft.com/office/drawing/2014/main" id="{E5159294-BF09-8E02-0237-1BE8EF4365A5}"/>
+            </a:ext>
+          </a:extLst>
+        </p:cNvPr>
+        <p:cNvGrpSpPr/>
+        <p:nvPr/>
+      </p:nvGrpSpPr>
+      <p:grpSpPr>
+        <a:xfrm>
+          <a:off x="0" y="0"/>
+          <a:ext cx="0" cy="0"/>
+          <a:chOff x="0" y="0"/>
+          <a:chExt cx="0" cy="0"/>
+        </a:xfrm>
+      </p:grpSpPr>
+      <p:sp>
+        <p:nvSpPr>
+          <p:cNvPr id="2" name="Rectangle 1">
+            <a:extLst>
+              <a:ext uri="{FF2B5EF4-FFF2-40B4-BE49-F238E27FC236}">
+                <a16:creationId xmlns:a16="http://schemas.microsoft.com/office/drawing/2014/main" id="{31FD9AF8-58B2-3139-0FD1-5E3986DD2708}"/>
+              </a:ext>
+            </a:extLst>
+          </p:cNvPr>
+          <p:cNvSpPr/>
+          <p:nvPr/>
+        </p:nvSpPr>
+        <p:spPr>
+          <a:xfrm>
+            <a:off x="6464710" y="3208962"/>
+            <a:ext cx="1759974" cy="1887791"/>
+          </a:xfrm>
+          <a:prstGeom prst="rect">
+            <a:avLst/>
+          </a:prstGeom>
+        </p:spPr>
+        <p:style>
+          <a:lnRef idx="1">
+            <a:schemeClr val="accent2"/>
+          </a:lnRef>
+          <a:fillRef idx="3">
+            <a:schemeClr val="accent2"/>
+          </a:fillRef>
+          <a:effectRef idx="2">
+            <a:schemeClr val="accent2"/>
+          </a:effectRef>
+          <a:fontRef idx="minor">
+            <a:schemeClr val="lt1"/>
+          </a:fontRef>
+        </p:style>
+        <p:txBody>
+          <a:bodyPr rtlCol="0" anchor="ctr"/>
+          <a:lstStyle/>
+          <a:p>
+            <a:pPr algn="ctr"/>
+            <a:r>
+              <a:rPr lang="en-US" dirty="0"/>
+              <a:t>CPU</a:t>
+            </a:r>
+          </a:p>
+        </p:txBody>
+      </p:sp>
+      <p:sp>
+        <p:nvSpPr>
+          <p:cNvPr id="3" name="Rectangle 2">
+            <a:extLst>
+              <a:ext uri="{FF2B5EF4-FFF2-40B4-BE49-F238E27FC236}">
+                <a16:creationId xmlns:a16="http://schemas.microsoft.com/office/drawing/2014/main" id="{B7453EB5-FEAC-E8A0-E0FA-1151D8025576}"/>
+              </a:ext>
+            </a:extLst>
+          </p:cNvPr>
+          <p:cNvSpPr/>
+          <p:nvPr/>
+        </p:nvSpPr>
+        <p:spPr>
+          <a:xfrm>
+            <a:off x="4640826" y="68827"/>
+            <a:ext cx="5759864" cy="2236124"/>
+          </a:xfrm>
+          <a:prstGeom prst="rect">
+            <a:avLst/>
+          </a:prstGeom>
+        </p:spPr>
+        <p:style>
+          <a:lnRef idx="1">
+            <a:schemeClr val="accent4"/>
+          </a:lnRef>
+          <a:fillRef idx="3">
+            <a:schemeClr val="accent4"/>
+          </a:fillRef>
+          <a:effectRef idx="2">
+            <a:schemeClr val="accent4"/>
+          </a:effectRef>
+          <a:fontRef idx="minor">
+            <a:schemeClr val="lt1"/>
+          </a:fontRef>
+        </p:style>
+        <p:txBody>
+          <a:bodyPr rtlCol="0" anchor="ctr"/>
+          <a:lstStyle/>
+          <a:p>
+            <a:pPr algn="ctr"/>
+            <a:r>
+              <a:rPr lang="en-US" dirty="0"/>
+              <a:t> Data Memory</a:t>
+            </a:r>
+          </a:p>
+        </p:txBody>
+      </p:sp>
+      <p:sp>
+        <p:nvSpPr>
+          <p:cNvPr id="5" name="Rectangle 4">
+            <a:extLst>
+              <a:ext uri="{FF2B5EF4-FFF2-40B4-BE49-F238E27FC236}">
+                <a16:creationId xmlns:a16="http://schemas.microsoft.com/office/drawing/2014/main" id="{4DE52019-9A63-296D-6162-57DDA590865E}"/>
+              </a:ext>
+            </a:extLst>
+          </p:cNvPr>
+          <p:cNvSpPr/>
+          <p:nvPr/>
+        </p:nvSpPr>
+        <p:spPr>
+          <a:xfrm>
+            <a:off x="5034117" y="5646807"/>
+            <a:ext cx="4621160" cy="896556"/>
+          </a:xfrm>
+          <a:prstGeom prst="rect">
+            <a:avLst/>
+          </a:prstGeom>
+        </p:spPr>
+        <p:style>
+          <a:lnRef idx="2">
+            <a:schemeClr val="accent6">
+              <a:shade val="15000"/>
+            </a:schemeClr>
+          </a:lnRef>
+          <a:fillRef idx="1">
+            <a:schemeClr val="accent6"/>
+          </a:fillRef>
+          <a:effectRef idx="0">
+            <a:schemeClr val="accent6"/>
+          </a:effectRef>
+          <a:fontRef idx="minor">
+            <a:schemeClr val="lt1"/>
+          </a:fontRef>
+        </p:style>
+        <p:txBody>
+          <a:bodyPr rtlCol="0" anchor="ctr"/>
+          <a:lstStyle/>
+          <a:p>
+            <a:pPr algn="ctr"/>
+            <a:r>
+              <a:rPr lang="en-US" dirty="0"/>
+              <a:t>Program memory</a:t>
+            </a:r>
+          </a:p>
+        </p:txBody>
+      </p:sp>
+      <p:sp>
+        <p:nvSpPr>
+          <p:cNvPr id="10" name="Rectangle 9">
+            <a:extLst>
+              <a:ext uri="{FF2B5EF4-FFF2-40B4-BE49-F238E27FC236}">
+                <a16:creationId xmlns:a16="http://schemas.microsoft.com/office/drawing/2014/main" id="{6E27CF75-9716-06AD-C08B-634298904F5D}"/>
+              </a:ext>
+            </a:extLst>
+          </p:cNvPr>
+          <p:cNvSpPr/>
+          <p:nvPr/>
+        </p:nvSpPr>
+        <p:spPr>
+          <a:xfrm>
+            <a:off x="6494207" y="314637"/>
+            <a:ext cx="1307690" cy="707913"/>
+          </a:xfrm>
+          <a:prstGeom prst="rect">
+            <a:avLst/>
+          </a:prstGeom>
+        </p:spPr>
+        <p:style>
+          <a:lnRef idx="2">
+            <a:schemeClr val="accent2">
+              <a:shade val="15000"/>
+            </a:schemeClr>
+          </a:lnRef>
+          <a:fillRef idx="1">
+            <a:schemeClr val="accent2"/>
+          </a:fillRef>
+          <a:effectRef idx="0">
+            <a:schemeClr val="accent2"/>
+          </a:effectRef>
+          <a:fontRef idx="minor">
+            <a:schemeClr val="lt1"/>
+          </a:fontRef>
+        </p:style>
+        <p:txBody>
+          <a:bodyPr rtlCol="0" anchor="ctr"/>
+          <a:lstStyle/>
+          <a:p>
+            <a:pPr algn="ctr"/>
+            <a:r>
+              <a:rPr lang="en-US" dirty="0"/>
+              <a:t>Data</a:t>
+            </a:r>
+          </a:p>
+        </p:txBody>
+      </p:sp>
+      <p:sp>
+        <p:nvSpPr>
+          <p:cNvPr id="11" name="Rectangle 10">
+            <a:extLst>
+              <a:ext uri="{FF2B5EF4-FFF2-40B4-BE49-F238E27FC236}">
+                <a16:creationId xmlns:a16="http://schemas.microsoft.com/office/drawing/2014/main" id="{EE9BB5AA-7A0B-B245-D61F-6DC1EAD9216D}"/>
+              </a:ext>
+            </a:extLst>
+          </p:cNvPr>
+          <p:cNvSpPr/>
+          <p:nvPr/>
+        </p:nvSpPr>
+        <p:spPr>
+          <a:xfrm>
+            <a:off x="8003459" y="314637"/>
+            <a:ext cx="1307690" cy="707913"/>
+          </a:xfrm>
+          <a:prstGeom prst="rect">
+            <a:avLst/>
+          </a:prstGeom>
+        </p:spPr>
+        <p:style>
+          <a:lnRef idx="2">
+            <a:schemeClr val="accent5">
+              <a:shade val="15000"/>
+            </a:schemeClr>
+          </a:lnRef>
+          <a:fillRef idx="1">
+            <a:schemeClr val="accent5"/>
+          </a:fillRef>
+          <a:effectRef idx="0">
+            <a:schemeClr val="accent5"/>
+          </a:effectRef>
+          <a:fontRef idx="minor">
+            <a:schemeClr val="lt1"/>
+          </a:fontRef>
+        </p:style>
+        <p:txBody>
+          <a:bodyPr rtlCol="0" anchor="ctr"/>
+          <a:lstStyle/>
+          <a:p>
+            <a:pPr algn="ctr"/>
+            <a:r>
+              <a:rPr lang="en-US" dirty="0" err="1"/>
+              <a:t>bss</a:t>
+            </a:r>
+            <a:endParaRPr lang="en-US" dirty="0"/>
+          </a:p>
+        </p:txBody>
+      </p:sp>
+      <p:sp>
+        <p:nvSpPr>
+          <p:cNvPr id="12" name="Rectangle 11">
+            <a:extLst>
+              <a:ext uri="{FF2B5EF4-FFF2-40B4-BE49-F238E27FC236}">
+                <a16:creationId xmlns:a16="http://schemas.microsoft.com/office/drawing/2014/main" id="{AA9EDB99-F4D1-5C52-BB3C-255DDA429639}"/>
+              </a:ext>
+            </a:extLst>
+          </p:cNvPr>
+          <p:cNvSpPr/>
+          <p:nvPr/>
+        </p:nvSpPr>
+        <p:spPr>
+          <a:xfrm>
+            <a:off x="6558116" y="1399836"/>
+            <a:ext cx="1307690" cy="707913"/>
+          </a:xfrm>
+          <a:prstGeom prst="rect">
+            <a:avLst/>
+          </a:prstGeom>
+        </p:spPr>
+        <p:style>
+          <a:lnRef idx="2">
+            <a:schemeClr val="accent5">
+              <a:shade val="15000"/>
+            </a:schemeClr>
+          </a:lnRef>
+          <a:fillRef idx="1">
+            <a:schemeClr val="accent5"/>
+          </a:fillRef>
+          <a:effectRef idx="0">
+            <a:schemeClr val="accent5"/>
+          </a:effectRef>
+          <a:fontRef idx="minor">
+            <a:schemeClr val="lt1"/>
+          </a:fontRef>
+        </p:style>
+        <p:txBody>
+          <a:bodyPr rtlCol="0" anchor="ctr"/>
+          <a:lstStyle/>
+          <a:p>
+            <a:pPr algn="ctr"/>
+            <a:r>
+              <a:rPr lang="en-US" dirty="0"/>
+              <a:t>stack</a:t>
+            </a:r>
+          </a:p>
+        </p:txBody>
+      </p:sp>
+      <p:sp>
+        <p:nvSpPr>
+          <p:cNvPr id="16" name="Rectangle 15">
+            <a:extLst>
+              <a:ext uri="{FF2B5EF4-FFF2-40B4-BE49-F238E27FC236}">
+                <a16:creationId xmlns:a16="http://schemas.microsoft.com/office/drawing/2014/main" id="{B2DEE583-586D-ABB2-2B8D-21A04562E484}"/>
+              </a:ext>
+            </a:extLst>
+          </p:cNvPr>
+          <p:cNvSpPr/>
+          <p:nvPr/>
+        </p:nvSpPr>
+        <p:spPr>
+          <a:xfrm>
+            <a:off x="8224684" y="1351932"/>
+            <a:ext cx="1307690" cy="707913"/>
+          </a:xfrm>
+          <a:prstGeom prst="rect">
+            <a:avLst/>
+          </a:prstGeom>
+        </p:spPr>
+        <p:style>
+          <a:lnRef idx="2">
+            <a:schemeClr val="accent5">
+              <a:shade val="15000"/>
+            </a:schemeClr>
+          </a:lnRef>
+          <a:fillRef idx="1">
+            <a:schemeClr val="accent5"/>
+          </a:fillRef>
+          <a:effectRef idx="0">
+            <a:schemeClr val="accent5"/>
+          </a:effectRef>
+          <a:fontRef idx="minor">
+            <a:schemeClr val="lt1"/>
+          </a:fontRef>
+        </p:style>
+        <p:txBody>
+          <a:bodyPr rtlCol="0" anchor="ctr"/>
+          <a:lstStyle/>
+          <a:p>
+            <a:pPr algn="ctr"/>
+            <a:r>
+              <a:rPr lang="en-US" dirty="0"/>
+              <a:t>heap</a:t>
+            </a:r>
+          </a:p>
+        </p:txBody>
+      </p:sp>
+      <p:cxnSp>
+        <p:nvCxnSpPr>
+          <p:cNvPr id="26" name="Straight Arrow Connector 25">
+            <a:extLst>
+              <a:ext uri="{FF2B5EF4-FFF2-40B4-BE49-F238E27FC236}">
+                <a16:creationId xmlns:a16="http://schemas.microsoft.com/office/drawing/2014/main" id="{E37C3CEB-2FDD-8835-ADEB-AE2C2921151B}"/>
+              </a:ext>
+            </a:extLst>
+          </p:cNvPr>
+          <p:cNvCxnSpPr/>
+          <p:nvPr/>
+        </p:nvCxnSpPr>
+        <p:spPr>
+          <a:xfrm flipV="1">
+            <a:off x="7049729" y="2304951"/>
+            <a:ext cx="0" cy="939694"/>
+          </a:xfrm>
+          <a:prstGeom prst="straightConnector1">
+            <a:avLst/>
+          </a:prstGeom>
+          <a:ln>
+            <a:tailEnd type="triangle"/>
+          </a:ln>
+        </p:spPr>
+        <p:style>
+          <a:lnRef idx="2">
+            <a:schemeClr val="accent1"/>
+          </a:lnRef>
+          <a:fillRef idx="0">
+            <a:schemeClr val="accent1"/>
+          </a:fillRef>
+          <a:effectRef idx="1">
+            <a:schemeClr val="accent1"/>
+          </a:effectRef>
+          <a:fontRef idx="minor">
+            <a:schemeClr val="tx1"/>
+          </a:fontRef>
+        </p:style>
+      </p:cxnSp>
+      <p:cxnSp>
+        <p:nvCxnSpPr>
+          <p:cNvPr id="27" name="Straight Arrow Connector 26">
+            <a:extLst>
+              <a:ext uri="{FF2B5EF4-FFF2-40B4-BE49-F238E27FC236}">
+                <a16:creationId xmlns:a16="http://schemas.microsoft.com/office/drawing/2014/main" id="{03720EFE-A27C-015A-EEBA-51CCF5BDF0D7}"/>
+              </a:ext>
+            </a:extLst>
+          </p:cNvPr>
+          <p:cNvCxnSpPr/>
+          <p:nvPr/>
+        </p:nvCxnSpPr>
+        <p:spPr>
+          <a:xfrm flipV="1">
+            <a:off x="7520758" y="2302182"/>
+            <a:ext cx="0" cy="939694"/>
+          </a:xfrm>
+          <a:prstGeom prst="straightConnector1">
+            <a:avLst/>
+          </a:prstGeom>
+          <a:ln>
+            <a:tailEnd type="triangle"/>
+          </a:ln>
+        </p:spPr>
+        <p:style>
+          <a:lnRef idx="2">
+            <a:schemeClr val="accent1"/>
+          </a:lnRef>
+          <a:fillRef idx="0">
+            <a:schemeClr val="accent1"/>
+          </a:fillRef>
+          <a:effectRef idx="1">
+            <a:schemeClr val="accent1"/>
+          </a:effectRef>
+          <a:fontRef idx="minor">
+            <a:schemeClr val="tx1"/>
+          </a:fontRef>
+        </p:style>
+      </p:cxnSp>
+      <p:cxnSp>
+        <p:nvCxnSpPr>
+          <p:cNvPr id="29" name="Straight Arrow Connector 28">
+            <a:extLst>
+              <a:ext uri="{FF2B5EF4-FFF2-40B4-BE49-F238E27FC236}">
+                <a16:creationId xmlns:a16="http://schemas.microsoft.com/office/drawing/2014/main" id="{166F55D6-44B4-2604-19AF-0AE0EB2EEC01}"/>
+              </a:ext>
+            </a:extLst>
+          </p:cNvPr>
+          <p:cNvCxnSpPr/>
+          <p:nvPr/>
+        </p:nvCxnSpPr>
+        <p:spPr>
+          <a:xfrm flipV="1">
+            <a:off x="8003459" y="2302182"/>
+            <a:ext cx="0" cy="939694"/>
+          </a:xfrm>
+          <a:prstGeom prst="straightConnector1">
+            <a:avLst/>
+          </a:prstGeom>
+          <a:ln>
+            <a:tailEnd type="triangle"/>
+          </a:ln>
+        </p:spPr>
+        <p:style>
+          <a:lnRef idx="2">
+            <a:schemeClr val="accent1"/>
+          </a:lnRef>
+          <a:fillRef idx="0">
+            <a:schemeClr val="accent1"/>
+          </a:fillRef>
+          <a:effectRef idx="1">
+            <a:schemeClr val="accent1"/>
+          </a:effectRef>
+          <a:fontRef idx="minor">
+            <a:schemeClr val="tx1"/>
+          </a:fontRef>
+        </p:style>
+      </p:cxnSp>
+      <p:cxnSp>
+        <p:nvCxnSpPr>
+          <p:cNvPr id="32" name="Straight Arrow Connector 31">
+            <a:extLst>
+              <a:ext uri="{FF2B5EF4-FFF2-40B4-BE49-F238E27FC236}">
+                <a16:creationId xmlns:a16="http://schemas.microsoft.com/office/drawing/2014/main" id="{748CCA35-C632-7084-F364-A6CF8CC51B2A}"/>
+              </a:ext>
+            </a:extLst>
+          </p:cNvPr>
+          <p:cNvCxnSpPr/>
+          <p:nvPr/>
+        </p:nvCxnSpPr>
+        <p:spPr>
+          <a:xfrm>
+            <a:off x="7049729" y="5096753"/>
+            <a:ext cx="0" cy="550054"/>
+          </a:xfrm>
+          <a:prstGeom prst="straightConnector1">
+            <a:avLst/>
+          </a:prstGeom>
+          <a:ln>
+            <a:tailEnd type="triangle"/>
+          </a:ln>
+        </p:spPr>
+        <p:style>
+          <a:lnRef idx="2">
+            <a:schemeClr val="accent1"/>
+          </a:lnRef>
+          <a:fillRef idx="0">
+            <a:schemeClr val="accent1"/>
+          </a:fillRef>
+          <a:effectRef idx="1">
+            <a:schemeClr val="accent1"/>
+          </a:effectRef>
+          <a:fontRef idx="minor">
+            <a:schemeClr val="tx1"/>
+          </a:fontRef>
+        </p:style>
+      </p:cxnSp>
+      <p:cxnSp>
+        <p:nvCxnSpPr>
+          <p:cNvPr id="33" name="Straight Arrow Connector 32">
+            <a:extLst>
+              <a:ext uri="{FF2B5EF4-FFF2-40B4-BE49-F238E27FC236}">
+                <a16:creationId xmlns:a16="http://schemas.microsoft.com/office/drawing/2014/main" id="{39593450-EED9-FAE0-FA96-1C3AA5D6AD43}"/>
+              </a:ext>
+            </a:extLst>
+          </p:cNvPr>
+          <p:cNvCxnSpPr/>
+          <p:nvPr/>
+        </p:nvCxnSpPr>
+        <p:spPr>
+          <a:xfrm>
+            <a:off x="7339781" y="5096753"/>
+            <a:ext cx="0" cy="550054"/>
+          </a:xfrm>
+          <a:prstGeom prst="straightConnector1">
+            <a:avLst/>
+          </a:prstGeom>
+          <a:ln>
+            <a:tailEnd type="triangle"/>
+          </a:ln>
+        </p:spPr>
+        <p:style>
+          <a:lnRef idx="2">
+            <a:schemeClr val="accent1"/>
+          </a:lnRef>
+          <a:fillRef idx="0">
+            <a:schemeClr val="accent1"/>
+          </a:fillRef>
+          <a:effectRef idx="1">
+            <a:schemeClr val="accent1"/>
+          </a:effectRef>
+          <a:fontRef idx="minor">
+            <a:schemeClr val="tx1"/>
+          </a:fontRef>
+        </p:style>
+      </p:cxnSp>
+      <p:cxnSp>
+        <p:nvCxnSpPr>
+          <p:cNvPr id="34" name="Straight Arrow Connector 33">
+            <a:extLst>
+              <a:ext uri="{FF2B5EF4-FFF2-40B4-BE49-F238E27FC236}">
+                <a16:creationId xmlns:a16="http://schemas.microsoft.com/office/drawing/2014/main" id="{9758CA42-E632-6A28-F05D-BB21A7D3EAC3}"/>
+              </a:ext>
+            </a:extLst>
+          </p:cNvPr>
+          <p:cNvCxnSpPr/>
+          <p:nvPr/>
+        </p:nvCxnSpPr>
+        <p:spPr>
+          <a:xfrm>
+            <a:off x="7708491" y="5096753"/>
+            <a:ext cx="0" cy="550054"/>
+          </a:xfrm>
+          <a:prstGeom prst="straightConnector1">
+            <a:avLst/>
+          </a:prstGeom>
+          <a:ln>
+            <a:tailEnd type="triangle"/>
+          </a:ln>
+        </p:spPr>
+        <p:style>
+          <a:lnRef idx="2">
+            <a:schemeClr val="accent1"/>
+          </a:lnRef>
+          <a:fillRef idx="0">
+            <a:schemeClr val="accent1"/>
+          </a:fillRef>
+          <a:effectRef idx="1">
+            <a:schemeClr val="accent1"/>
+          </a:effectRef>
+          <a:fontRef idx="minor">
+            <a:schemeClr val="tx1"/>
+          </a:fontRef>
+        </p:style>
+      </p:cxnSp>
+    </p:spTree>
+    <p:extLst>
+      <p:ext uri="{BB962C8B-B14F-4D97-AF65-F5344CB8AC3E}">
+        <p14:creationId xmlns:p14="http://schemas.microsoft.com/office/powerpoint/2010/main" val="3511411809"/>
       </p:ext>
     </p:extLst>
   </p:cSld>
